--- a/outline.pptx
+++ b/outline.pptx
@@ -6,13 +6,8 @@
   </p:sldMasterIdLst>
   <p:sldIdLst>
     <p:sldId id="260" r:id="rId2"/>
-    <p:sldId id="256" r:id="rId3"/>
-    <p:sldId id="258" r:id="rId4"/>
-    <p:sldId id="261" r:id="rId5"/>
-    <p:sldId id="262" r:id="rId6"/>
-    <p:sldId id="263" r:id="rId7"/>
-    <p:sldId id="264" r:id="rId8"/>
-    <p:sldId id="265" r:id="rId9"/>
+    <p:sldId id="261" r:id="rId3"/>
+    <p:sldId id="262" r:id="rId4"/>
   </p:sldIdLst>
   <p:sldSz cx="12192000" cy="6858000"/>
   <p:notesSz cx="6858000" cy="9144000"/>
@@ -266,7 +261,7 @@
           <a:p>
             <a:fld id="{2501807F-4839-7042-85F8-7E765409A7F2}" type="datetimeFigureOut">
               <a:rPr lang="en-US" smtClean="0"/>
-              <a:t>7/21/26</a:t>
+              <a:t>8/15/26</a:t>
             </a:fld>
             <a:endParaRPr lang="en-US"/>
           </a:p>
@@ -464,7 +459,7 @@
           <a:p>
             <a:fld id="{2501807F-4839-7042-85F8-7E765409A7F2}" type="datetimeFigureOut">
               <a:rPr lang="en-US" smtClean="0"/>
-              <a:t>7/21/26</a:t>
+              <a:t>8/15/26</a:t>
             </a:fld>
             <a:endParaRPr lang="en-US"/>
           </a:p>
@@ -672,7 +667,7 @@
           <a:p>
             <a:fld id="{2501807F-4839-7042-85F8-7E765409A7F2}" type="datetimeFigureOut">
               <a:rPr lang="en-US" smtClean="0"/>
-              <a:t>7/21/26</a:t>
+              <a:t>8/15/26</a:t>
             </a:fld>
             <a:endParaRPr lang="en-US"/>
           </a:p>
@@ -870,7 +865,7 @@
           <a:p>
             <a:fld id="{2501807F-4839-7042-85F8-7E765409A7F2}" type="datetimeFigureOut">
               <a:rPr lang="en-US" smtClean="0"/>
-              <a:t>7/21/26</a:t>
+              <a:t>8/15/26</a:t>
             </a:fld>
             <a:endParaRPr lang="en-US"/>
           </a:p>
@@ -1145,7 +1140,7 @@
           <a:p>
             <a:fld id="{2501807F-4839-7042-85F8-7E765409A7F2}" type="datetimeFigureOut">
               <a:rPr lang="en-US" smtClean="0"/>
-              <a:t>7/21/26</a:t>
+              <a:t>8/15/26</a:t>
             </a:fld>
             <a:endParaRPr lang="en-US"/>
           </a:p>
@@ -1410,7 +1405,7 @@
           <a:p>
             <a:fld id="{2501807F-4839-7042-85F8-7E765409A7F2}" type="datetimeFigureOut">
               <a:rPr lang="en-US" smtClean="0"/>
-              <a:t>7/21/26</a:t>
+              <a:t>8/15/26</a:t>
             </a:fld>
             <a:endParaRPr lang="en-US"/>
           </a:p>
@@ -1822,7 +1817,7 @@
           <a:p>
             <a:fld id="{2501807F-4839-7042-85F8-7E765409A7F2}" type="datetimeFigureOut">
               <a:rPr lang="en-US" smtClean="0"/>
-              <a:t>7/21/26</a:t>
+              <a:t>8/15/26</a:t>
             </a:fld>
             <a:endParaRPr lang="en-US"/>
           </a:p>
@@ -1963,7 +1958,7 @@
           <a:p>
             <a:fld id="{2501807F-4839-7042-85F8-7E765409A7F2}" type="datetimeFigureOut">
               <a:rPr lang="en-US" smtClean="0"/>
-              <a:t>7/21/26</a:t>
+              <a:t>8/15/26</a:t>
             </a:fld>
             <a:endParaRPr lang="en-US"/>
           </a:p>
@@ -2076,7 +2071,7 @@
           <a:p>
             <a:fld id="{2501807F-4839-7042-85F8-7E765409A7F2}" type="datetimeFigureOut">
               <a:rPr lang="en-US" smtClean="0"/>
-              <a:t>7/21/26</a:t>
+              <a:t>8/15/26</a:t>
             </a:fld>
             <a:endParaRPr lang="en-US"/>
           </a:p>
@@ -2387,7 +2382,7 @@
           <a:p>
             <a:fld id="{2501807F-4839-7042-85F8-7E765409A7F2}" type="datetimeFigureOut">
               <a:rPr lang="en-US" smtClean="0"/>
-              <a:t>7/21/26</a:t>
+              <a:t>8/15/26</a:t>
             </a:fld>
             <a:endParaRPr lang="en-US"/>
           </a:p>
@@ -2675,7 +2670,7 @@
           <a:p>
             <a:fld id="{2501807F-4839-7042-85F8-7E765409A7F2}" type="datetimeFigureOut">
               <a:rPr lang="en-US" smtClean="0"/>
-              <a:t>7/21/26</a:t>
+              <a:t>8/15/26</a:t>
             </a:fld>
             <a:endParaRPr lang="en-US"/>
           </a:p>
@@ -2916,7 +2911,7 @@
           <a:p>
             <a:fld id="{2501807F-4839-7042-85F8-7E765409A7F2}" type="datetimeFigureOut">
               <a:rPr lang="en-US" smtClean="0"/>
-              <a:t>7/21/26</a:t>
+              <a:t>8/15/26</a:t>
             </a:fld>
             <a:endParaRPr lang="en-US"/>
           </a:p>
@@ -3333,81 +3328,36 @@
           <a:chExt cx="0" cy="0"/>
         </a:xfrm>
       </p:grpSpPr>
-      <p:sp>
-        <p:nvSpPr>
-          <p:cNvPr id="2" name="Title 1">
-            <a:extLst>
-              <a:ext uri="{FF2B5EF4-FFF2-40B4-BE49-F238E27FC236}">
-                <a16:creationId xmlns:a16="http://schemas.microsoft.com/office/drawing/2014/main" id="{BCBE5ADF-F720-4E27-9340-0D398104B1F8}"/>
-              </a:ext>
-            </a:extLst>
-          </p:cNvPr>
-          <p:cNvSpPr>
-            <a:spLocks noGrp="1"/>
-          </p:cNvSpPr>
-          <p:nvPr>
-            <p:ph type="title"/>
-          </p:nvPr>
-        </p:nvSpPr>
-        <p:spPr/>
-        <p:txBody>
-          <a:bodyPr/>
-          <a:lstStyle/>
-          <a:p>
-            <a:r>
-              <a:rPr lang="en-US" dirty="0"/>
-              <a:t>The Unreasonable Effectiveness of Quarto</a:t>
-            </a:r>
-          </a:p>
-        </p:txBody>
-      </p:sp>
-      <p:sp>
-        <p:nvSpPr>
-          <p:cNvPr id="4" name="TextBox 3">
-            <a:extLst>
-              <a:ext uri="{FF2B5EF4-FFF2-40B4-BE49-F238E27FC236}">
-                <a16:creationId xmlns:a16="http://schemas.microsoft.com/office/drawing/2014/main" id="{855E733C-63EA-1C5F-CD62-6EFF387F7E56}"/>
-              </a:ext>
-            </a:extLst>
-          </p:cNvPr>
-          <p:cNvSpPr txBox="1"/>
+      <p:pic>
+        <p:nvPicPr>
+          <p:cNvPr id="6" name="Picture 5">
+            <a:extLst>
+              <a:ext uri="{FF2B5EF4-FFF2-40B4-BE49-F238E27FC236}">
+                <a16:creationId xmlns:a16="http://schemas.microsoft.com/office/drawing/2014/main" id="{AB5DCE1E-9994-23E9-5BCF-3153B38D5ED4}"/>
+              </a:ext>
+            </a:extLst>
+          </p:cNvPr>
+          <p:cNvPicPr>
+            <a:picLocks noChangeAspect="1"/>
+          </p:cNvPicPr>
           <p:nvPr/>
-        </p:nvSpPr>
+        </p:nvPicPr>
+        <p:blipFill>
+          <a:blip r:embed="rId2"/>
+          <a:stretch>
+            <a:fillRect/>
+          </a:stretch>
+        </p:blipFill>
         <p:spPr>
           <a:xfrm>
-            <a:off x="838200" y="2020186"/>
-            <a:ext cx="7414081" cy="923330"/>
+            <a:off x="4141972" y="2273300"/>
+            <a:ext cx="3911600" cy="2311400"/>
           </a:xfrm>
           <a:prstGeom prst="rect">
             <a:avLst/>
           </a:prstGeom>
-          <a:noFill/>
         </p:spPr>
-        <p:txBody>
-          <a:bodyPr wrap="none" rtlCol="0">
-            <a:spAutoFit/>
-          </a:bodyPr>
-          <a:lstStyle/>
-          <a:p>
-            <a:r>
-              <a:rPr lang="en-US" dirty="0"/>
-              <a:t>Based on blog post:</a:t>
-            </a:r>
-          </a:p>
-          <a:p>
-            <a:r>
-              <a:rPr lang="en-US" dirty="0">
-                <a:hlinkClick r:id="rId2"/>
-              </a:rPr>
-              <a:t>https://www.jhelvy.com/blog/2026-05-12-quarto-optimal-claude-output/</a:t>
-            </a:r>
-            <a:endParaRPr lang="en-US" dirty="0"/>
-          </a:p>
-          <a:p>
-            <a:endParaRPr lang="en-US" dirty="0"/>
-          </a:p>
-        </p:txBody>
-      </p:sp>
+      </p:pic>
     </p:spTree>
     <p:extLst>
       <p:ext uri="{BB962C8B-B14F-4D97-AF65-F5344CB8AC3E}">
@@ -3426,7 +3376,13 @@
   <p:cSld>
     <p:spTree>
       <p:nvGrpSpPr>
-        <p:cNvPr id="1" name=""/>
+        <p:cNvPr id="1" name="">
+          <a:extLst>
+            <a:ext uri="{FF2B5EF4-FFF2-40B4-BE49-F238E27FC236}">
+              <a16:creationId xmlns:a16="http://schemas.microsoft.com/office/drawing/2014/main" id="{D49E4ACA-A154-246E-DD95-244257C663B6}"/>
+            </a:ext>
+          </a:extLst>
+        </p:cNvPr>
         <p:cNvGrpSpPr/>
         <p:nvPr/>
       </p:nvGrpSpPr>
@@ -3438,415 +3394,52 @@
           <a:chExt cx="0" cy="0"/>
         </a:xfrm>
       </p:grpSpPr>
-      <p:sp>
-        <p:nvSpPr>
-          <p:cNvPr id="4" name="Rounded Rectangle 3">
-            <a:extLst>
-              <a:ext uri="{FF2B5EF4-FFF2-40B4-BE49-F238E27FC236}">
-                <a16:creationId xmlns:a16="http://schemas.microsoft.com/office/drawing/2014/main" id="{59547C9E-257F-748E-DAB6-1F3867CE393C}"/>
-              </a:ext>
-            </a:extLst>
-          </p:cNvPr>
-          <p:cNvSpPr/>
+      <p:pic>
+        <p:nvPicPr>
+          <p:cNvPr id="6" name="Picture 5">
+            <a:extLst>
+              <a:ext uri="{FF2B5EF4-FFF2-40B4-BE49-F238E27FC236}">
+                <a16:creationId xmlns:a16="http://schemas.microsoft.com/office/drawing/2014/main" id="{1729C9ED-56EF-ED9B-7A26-45C4DA73B291}"/>
+              </a:ext>
+            </a:extLst>
+          </p:cNvPr>
+          <p:cNvPicPr>
+            <a:picLocks noChangeAspect="1"/>
+          </p:cNvPicPr>
           <p:nvPr/>
-        </p:nvSpPr>
+        </p:nvPicPr>
+        <p:blipFill>
+          <a:blip r:embed="rId2"/>
+          <a:stretch>
+            <a:fillRect/>
+          </a:stretch>
+        </p:blipFill>
         <p:spPr>
           <a:xfrm>
-            <a:off x="776177" y="2687379"/>
-            <a:ext cx="1169581" cy="927687"/>
+            <a:off x="941572" y="2273300"/>
+            <a:ext cx="3911600" cy="2311400"/>
           </a:xfrm>
-          <a:prstGeom prst="roundRect">
-            <a:avLst/>
-          </a:prstGeom>
-          <a:ln>
-            <a:solidFill>
-              <a:schemeClr val="tx1"/>
-            </a:solidFill>
-          </a:ln>
-        </p:spPr>
-        <p:style>
-          <a:lnRef idx="2">
-            <a:schemeClr val="accent6"/>
-          </a:lnRef>
-          <a:fillRef idx="1">
-            <a:schemeClr val="lt1"/>
-          </a:fillRef>
-          <a:effectRef idx="0">
-            <a:schemeClr val="accent6"/>
-          </a:effectRef>
-          <a:fontRef idx="minor">
-            <a:schemeClr val="dk1"/>
-          </a:fontRef>
-        </p:style>
-        <p:txBody>
-          <a:bodyPr rtlCol="0" anchor="ctr"/>
-          <a:lstStyle/>
-          <a:p>
-            <a:pPr algn="ctr"/>
-            <a:r>
-              <a:rPr lang="en-US" dirty="0"/>
-              <a:t>Me</a:t>
-            </a:r>
-          </a:p>
-        </p:txBody>
-      </p:sp>
-      <p:sp>
-        <p:nvSpPr>
-          <p:cNvPr id="5" name="Rounded Rectangle 4">
-            <a:extLst>
-              <a:ext uri="{FF2B5EF4-FFF2-40B4-BE49-F238E27FC236}">
-                <a16:creationId xmlns:a16="http://schemas.microsoft.com/office/drawing/2014/main" id="{FE2CD30F-E4C4-1A19-AE83-9592E269A4C8}"/>
-              </a:ext>
-            </a:extLst>
-          </p:cNvPr>
-          <p:cNvSpPr/>
-          <p:nvPr/>
-        </p:nvSpPr>
-        <p:spPr>
-          <a:xfrm>
-            <a:off x="3437863" y="2687379"/>
-            <a:ext cx="1169581" cy="927687"/>
-          </a:xfrm>
-          <a:prstGeom prst="roundRect">
-            <a:avLst/>
-          </a:prstGeom>
-          <a:ln>
-            <a:solidFill>
-              <a:schemeClr val="tx1"/>
-            </a:solidFill>
-          </a:ln>
-        </p:spPr>
-        <p:style>
-          <a:lnRef idx="2">
-            <a:schemeClr val="accent6"/>
-          </a:lnRef>
-          <a:fillRef idx="1">
-            <a:schemeClr val="lt1"/>
-          </a:fillRef>
-          <a:effectRef idx="0">
-            <a:schemeClr val="accent6"/>
-          </a:effectRef>
-          <a:fontRef idx="minor">
-            <a:schemeClr val="dk1"/>
-          </a:fontRef>
-        </p:style>
-        <p:txBody>
-          <a:bodyPr rtlCol="0" anchor="ctr"/>
-          <a:lstStyle/>
-          <a:p>
-            <a:pPr algn="ctr"/>
-            <a:r>
-              <a:rPr lang="en-US" dirty="0"/>
-              <a:t>Agent</a:t>
-            </a:r>
-          </a:p>
-        </p:txBody>
-      </p:sp>
-      <p:sp>
-        <p:nvSpPr>
-          <p:cNvPr id="6" name="Snip Diagonal Corner Rectangle 5">
-            <a:extLst>
-              <a:ext uri="{FF2B5EF4-FFF2-40B4-BE49-F238E27FC236}">
-                <a16:creationId xmlns:a16="http://schemas.microsoft.com/office/drawing/2014/main" id="{6194D3EF-A47F-97B6-02FC-C1A019AA3307}"/>
-              </a:ext>
-            </a:extLst>
-          </p:cNvPr>
-          <p:cNvSpPr/>
-          <p:nvPr/>
-        </p:nvSpPr>
-        <p:spPr>
-          <a:xfrm>
-            <a:off x="8765805" y="2687380"/>
-            <a:ext cx="1792313" cy="927686"/>
-          </a:xfrm>
-          <a:prstGeom prst="snip2DiagRect">
+          <a:prstGeom prst="rect">
             <a:avLst/>
           </a:prstGeom>
         </p:spPr>
-        <p:style>
-          <a:lnRef idx="2">
-            <a:schemeClr val="accent1">
-              <a:shade val="15000"/>
-            </a:schemeClr>
-          </a:lnRef>
-          <a:fillRef idx="1">
-            <a:schemeClr val="accent1"/>
-          </a:fillRef>
-          <a:effectRef idx="0">
-            <a:schemeClr val="accent1"/>
-          </a:effectRef>
-          <a:fontRef idx="minor">
-            <a:schemeClr val="lt1"/>
-          </a:fontRef>
-        </p:style>
-        <p:txBody>
-          <a:bodyPr rtlCol="0" anchor="ctr"/>
-          <a:lstStyle/>
-          <a:p>
-            <a:pPr algn="ctr"/>
-            <a:r>
-              <a:rPr lang="en-US" dirty="0"/>
-              <a:t>Artifact</a:t>
-            </a:r>
-          </a:p>
-          <a:p>
-            <a:pPr algn="ctr"/>
-            <a:r>
-              <a:rPr lang="en-US" dirty="0"/>
-              <a:t>(Probabilistic)</a:t>
-            </a:r>
-          </a:p>
-        </p:txBody>
-      </p:sp>
-      <p:sp>
-        <p:nvSpPr>
-          <p:cNvPr id="7" name="Rounded Rectangle 6">
-            <a:extLst>
-              <a:ext uri="{FF2B5EF4-FFF2-40B4-BE49-F238E27FC236}">
-                <a16:creationId xmlns:a16="http://schemas.microsoft.com/office/drawing/2014/main" id="{55E576CD-602E-30C0-2EC9-A782AF2DE52A}"/>
-              </a:ext>
-            </a:extLst>
-          </p:cNvPr>
-          <p:cNvSpPr/>
+      </p:pic>
+      <p:sp>
+        <p:nvSpPr>
+          <p:cNvPr id="2" name="TextBox 1">
+            <a:extLst>
+              <a:ext uri="{FF2B5EF4-FFF2-40B4-BE49-F238E27FC236}">
+                <a16:creationId xmlns:a16="http://schemas.microsoft.com/office/drawing/2014/main" id="{C77E7D7B-1EE5-6731-FBAC-D59406D30149}"/>
+              </a:ext>
+            </a:extLst>
+          </p:cNvPr>
+          <p:cNvSpPr txBox="1"/>
           <p:nvPr/>
         </p:nvSpPr>
         <p:spPr>
           <a:xfrm>
-            <a:off x="3437863" y="4516481"/>
-            <a:ext cx="1169581" cy="927688"/>
-          </a:xfrm>
-          <a:prstGeom prst="roundRect">
-            <a:avLst/>
-          </a:prstGeom>
-        </p:spPr>
-        <p:style>
-          <a:lnRef idx="2">
-            <a:schemeClr val="accent2"/>
-          </a:lnRef>
-          <a:fillRef idx="1">
-            <a:schemeClr val="lt1"/>
-          </a:fillRef>
-          <a:effectRef idx="0">
-            <a:schemeClr val="accent2"/>
-          </a:effectRef>
-          <a:fontRef idx="minor">
-            <a:schemeClr val="dk1"/>
-          </a:fontRef>
-        </p:style>
-        <p:txBody>
-          <a:bodyPr rtlCol="0" anchor="ctr"/>
-          <a:lstStyle/>
-          <a:p>
-            <a:pPr algn="ctr"/>
-            <a:r>
-              <a:rPr lang="en-US" dirty="0"/>
-              <a:t>Data</a:t>
-            </a:r>
-          </a:p>
-        </p:txBody>
-      </p:sp>
-      <p:cxnSp>
-        <p:nvCxnSpPr>
-          <p:cNvPr id="9" name="Straight Arrow Connector 8">
-            <a:extLst>
-              <a:ext uri="{FF2B5EF4-FFF2-40B4-BE49-F238E27FC236}">
-                <a16:creationId xmlns:a16="http://schemas.microsoft.com/office/drawing/2014/main" id="{DA2B43E1-858D-7F07-B0C0-850C340C26C9}"/>
-              </a:ext>
-            </a:extLst>
-          </p:cNvPr>
-          <p:cNvCxnSpPr>
-            <a:cxnSpLocks/>
-            <a:stCxn id="4" idx="3"/>
-            <a:endCxn id="5" idx="1"/>
-          </p:cNvCxnSpPr>
-          <p:nvPr/>
-        </p:nvCxnSpPr>
-        <p:spPr>
-          <a:xfrm>
-            <a:off x="1945758" y="3151223"/>
-            <a:ext cx="1492105" cy="0"/>
-          </a:xfrm>
-          <a:prstGeom prst="straightConnector1">
-            <a:avLst/>
-          </a:prstGeom>
-          <a:ln>
-            <a:solidFill>
-              <a:schemeClr val="tx1"/>
-            </a:solidFill>
-            <a:tailEnd type="triangle" w="lg" len="lg"/>
-          </a:ln>
-        </p:spPr>
-        <p:style>
-          <a:lnRef idx="2">
-            <a:schemeClr val="accent1"/>
-          </a:lnRef>
-          <a:fillRef idx="0">
-            <a:schemeClr val="accent1"/>
-          </a:fillRef>
-          <a:effectRef idx="1">
-            <a:schemeClr val="accent1"/>
-          </a:effectRef>
-          <a:fontRef idx="minor">
-            <a:schemeClr val="tx1"/>
-          </a:fontRef>
-        </p:style>
-      </p:cxnSp>
-      <p:cxnSp>
-        <p:nvCxnSpPr>
-          <p:cNvPr id="10" name="Straight Arrow Connector 9">
-            <a:extLst>
-              <a:ext uri="{FF2B5EF4-FFF2-40B4-BE49-F238E27FC236}">
-                <a16:creationId xmlns:a16="http://schemas.microsoft.com/office/drawing/2014/main" id="{B0A06500-9C2A-E8B9-A219-F48F6E47DDB9}"/>
-              </a:ext>
-            </a:extLst>
-          </p:cNvPr>
-          <p:cNvCxnSpPr>
-            <a:cxnSpLocks/>
-            <a:stCxn id="5" idx="3"/>
-            <a:endCxn id="6" idx="2"/>
-          </p:cNvCxnSpPr>
-          <p:nvPr/>
-        </p:nvCxnSpPr>
-        <p:spPr>
-          <a:xfrm>
-            <a:off x="4607444" y="3151223"/>
-            <a:ext cx="4158361" cy="0"/>
-          </a:xfrm>
-          <a:prstGeom prst="straightConnector1">
-            <a:avLst/>
-          </a:prstGeom>
-          <a:ln>
-            <a:solidFill>
-              <a:schemeClr val="tx1"/>
-            </a:solidFill>
-            <a:tailEnd type="triangle" w="lg" len="lg"/>
-          </a:ln>
-        </p:spPr>
-        <p:style>
-          <a:lnRef idx="2">
-            <a:schemeClr val="accent1"/>
-          </a:lnRef>
-          <a:fillRef idx="0">
-            <a:schemeClr val="accent1"/>
-          </a:fillRef>
-          <a:effectRef idx="1">
-            <a:schemeClr val="accent1"/>
-          </a:effectRef>
-          <a:fontRef idx="minor">
-            <a:schemeClr val="tx1"/>
-          </a:fontRef>
-        </p:style>
-      </p:cxnSp>
-      <p:cxnSp>
-        <p:nvCxnSpPr>
-          <p:cNvPr id="13" name="Straight Arrow Connector 12">
-            <a:extLst>
-              <a:ext uri="{FF2B5EF4-FFF2-40B4-BE49-F238E27FC236}">
-                <a16:creationId xmlns:a16="http://schemas.microsoft.com/office/drawing/2014/main" id="{A88584F1-4E08-496D-97A7-F109406C4417}"/>
-              </a:ext>
-            </a:extLst>
-          </p:cNvPr>
-          <p:cNvCxnSpPr>
-            <a:cxnSpLocks/>
-            <a:stCxn id="7" idx="0"/>
-            <a:endCxn id="5" idx="2"/>
-          </p:cNvCxnSpPr>
-          <p:nvPr/>
-        </p:nvCxnSpPr>
-        <p:spPr>
-          <a:xfrm flipV="1">
-            <a:off x="4022654" y="3615066"/>
-            <a:ext cx="0" cy="901415"/>
-          </a:xfrm>
-          <a:prstGeom prst="straightConnector1">
-            <a:avLst/>
-          </a:prstGeom>
-          <a:ln>
-            <a:solidFill>
-              <a:schemeClr val="tx1"/>
-            </a:solidFill>
-            <a:tailEnd type="triangle" w="lg" len="lg"/>
-          </a:ln>
-        </p:spPr>
-        <p:style>
-          <a:lnRef idx="2">
-            <a:schemeClr val="accent1"/>
-          </a:lnRef>
-          <a:fillRef idx="0">
-            <a:schemeClr val="accent1"/>
-          </a:fillRef>
-          <a:effectRef idx="1">
-            <a:schemeClr val="accent1"/>
-          </a:effectRef>
-          <a:fontRef idx="minor">
-            <a:schemeClr val="tx1"/>
-          </a:fontRef>
-        </p:style>
-      </p:cxnSp>
-      <p:cxnSp>
-        <p:nvCxnSpPr>
-          <p:cNvPr id="17" name="Elbow Connector 16">
-            <a:extLst>
-              <a:ext uri="{FF2B5EF4-FFF2-40B4-BE49-F238E27FC236}">
-                <a16:creationId xmlns:a16="http://schemas.microsoft.com/office/drawing/2014/main" id="{A3137D5A-03A0-2F74-7020-987AC0A88A01}"/>
-              </a:ext>
-            </a:extLst>
-          </p:cNvPr>
-          <p:cNvCxnSpPr>
-            <a:cxnSpLocks/>
-            <a:stCxn id="6" idx="1"/>
-            <a:endCxn id="4" idx="2"/>
-          </p:cNvCxnSpPr>
-          <p:nvPr/>
-        </p:nvCxnSpPr>
-        <p:spPr>
-          <a:xfrm rot="5400000">
-            <a:off x="5511465" y="-535431"/>
-            <a:ext cx="12700" cy="8300994"/>
-          </a:xfrm>
-          <a:prstGeom prst="bentConnector3">
-            <a:avLst>
-              <a:gd name="adj1" fmla="val 16283724"/>
-            </a:avLst>
-          </a:prstGeom>
-          <a:ln>
-            <a:solidFill>
-              <a:schemeClr val="tx1"/>
-            </a:solidFill>
-            <a:tailEnd type="triangle" w="lg" len="lg"/>
-          </a:ln>
-        </p:spPr>
-        <p:style>
-          <a:lnRef idx="2">
-            <a:schemeClr val="accent1"/>
-          </a:lnRef>
-          <a:fillRef idx="0">
-            <a:schemeClr val="accent1"/>
-          </a:fillRef>
-          <a:effectRef idx="1">
-            <a:schemeClr val="accent1"/>
-          </a:effectRef>
-          <a:fontRef idx="minor">
-            <a:schemeClr val="tx1"/>
-          </a:fontRef>
-        </p:style>
-      </p:cxnSp>
-      <p:sp>
-        <p:nvSpPr>
-          <p:cNvPr id="21" name="TextBox 20">
-            <a:extLst>
-              <a:ext uri="{FF2B5EF4-FFF2-40B4-BE49-F238E27FC236}">
-                <a16:creationId xmlns:a16="http://schemas.microsoft.com/office/drawing/2014/main" id="{CBC18299-17A8-C24E-2918-D703B622CA22}"/>
-              </a:ext>
-            </a:extLst>
-          </p:cNvPr>
-          <p:cNvSpPr txBox="1"/>
-          <p:nvPr/>
-        </p:nvSpPr>
-        <p:spPr>
-          <a:xfrm>
-            <a:off x="2165597" y="2784697"/>
-            <a:ext cx="918265" cy="369332"/>
+            <a:off x="5989258" y="2967335"/>
+            <a:ext cx="3829318" cy="923330"/>
           </a:xfrm>
           <a:prstGeom prst="rect">
             <a:avLst/>
@@ -3854,141 +3447,14 @@
           <a:noFill/>
         </p:spPr>
         <p:txBody>
-          <a:bodyPr wrap="none" rtlCol="0" anchor="ctr">
+          <a:bodyPr wrap="none" rtlCol="0">
             <a:spAutoFit/>
           </a:bodyPr>
           <a:lstStyle/>
           <a:p>
-            <a:pPr algn="ctr"/>
-            <a:r>
-              <a:rPr lang="en-US" dirty="0"/>
-              <a:t>Prompt</a:t>
-            </a:r>
-          </a:p>
-        </p:txBody>
-      </p:sp>
-      <p:sp>
-        <p:nvSpPr>
-          <p:cNvPr id="22" name="TextBox 21">
-            <a:extLst>
-              <a:ext uri="{FF2B5EF4-FFF2-40B4-BE49-F238E27FC236}">
-                <a16:creationId xmlns:a16="http://schemas.microsoft.com/office/drawing/2014/main" id="{AE4D5E7A-DAA3-F32E-DA52-E0E724F48F7E}"/>
-              </a:ext>
-            </a:extLst>
-          </p:cNvPr>
-          <p:cNvSpPr txBox="1"/>
-          <p:nvPr/>
-        </p:nvSpPr>
-        <p:spPr>
-          <a:xfrm>
-            <a:off x="6104119" y="2778716"/>
-            <a:ext cx="1218154" cy="369332"/>
-          </a:xfrm>
-          <a:prstGeom prst="rect">
-            <a:avLst/>
-          </a:prstGeom>
-          <a:noFill/>
-        </p:spPr>
-        <p:txBody>
-          <a:bodyPr wrap="none" rtlCol="0" anchor="ctr">
-            <a:spAutoFit/>
-          </a:bodyPr>
-          <a:lstStyle/>
-          <a:p>
-            <a:pPr algn="ctr"/>
-            <a:r>
-              <a:rPr lang="en-US" dirty="0"/>
-              <a:t>Generates</a:t>
-            </a:r>
-          </a:p>
-        </p:txBody>
-      </p:sp>
-      <p:sp>
-        <p:nvSpPr>
-          <p:cNvPr id="23" name="TextBox 22">
-            <a:extLst>
-              <a:ext uri="{FF2B5EF4-FFF2-40B4-BE49-F238E27FC236}">
-                <a16:creationId xmlns:a16="http://schemas.microsoft.com/office/drawing/2014/main" id="{417A6195-F83D-1445-2EE2-26DD37B0102E}"/>
-              </a:ext>
-            </a:extLst>
-          </p:cNvPr>
-          <p:cNvSpPr txBox="1"/>
-          <p:nvPr/>
-        </p:nvSpPr>
-        <p:spPr>
-          <a:xfrm>
-            <a:off x="3721075" y="5769199"/>
-            <a:ext cx="3270447" cy="369332"/>
-          </a:xfrm>
-          <a:prstGeom prst="rect">
-            <a:avLst/>
-          </a:prstGeom>
-          <a:noFill/>
-        </p:spPr>
-        <p:txBody>
-          <a:bodyPr wrap="none" rtlCol="0" anchor="ctr">
-            <a:spAutoFit/>
-          </a:bodyPr>
-          <a:lstStyle/>
-          <a:p>
-            <a:pPr algn="ctr"/>
-            <a:r>
-              <a:rPr lang="en-US" dirty="0"/>
-              <a:t>Review artifact, then re-prompt</a:t>
-            </a:r>
-          </a:p>
-        </p:txBody>
-      </p:sp>
-      <p:sp>
-        <p:nvSpPr>
-          <p:cNvPr id="2" name="Title 1">
-            <a:extLst>
-              <a:ext uri="{FF2B5EF4-FFF2-40B4-BE49-F238E27FC236}">
-                <a16:creationId xmlns:a16="http://schemas.microsoft.com/office/drawing/2014/main" id="{08CD2F3F-17D2-AAF6-0BDF-AD00EE83893A}"/>
-              </a:ext>
-            </a:extLst>
-          </p:cNvPr>
-          <p:cNvSpPr txBox="1">
-            <a:spLocks/>
-          </p:cNvSpPr>
-          <p:nvPr/>
-        </p:nvSpPr>
-        <p:spPr>
-          <a:xfrm>
-            <a:off x="838200" y="365125"/>
-            <a:ext cx="10515600" cy="1325563"/>
-          </a:xfrm>
-          <a:prstGeom prst="rect">
-            <a:avLst/>
-          </a:prstGeom>
-        </p:spPr>
-        <p:txBody>
-          <a:bodyPr vert="horz" lIns="91440" tIns="45720" rIns="91440" bIns="45720" rtlCol="0" anchor="b">
-            <a:normAutofit/>
-          </a:bodyPr>
-          <a:lstStyle>
-            <a:lvl1pPr algn="ctr" defTabSz="914400" rtl="0" eaLnBrk="1" latinLnBrk="0" hangingPunct="1">
-              <a:lnSpc>
-                <a:spcPct val="90000"/>
-              </a:lnSpc>
-              <a:spcBef>
-                <a:spcPct val="0"/>
-              </a:spcBef>
-              <a:buNone/>
-              <a:defRPr sz="6000" kern="1200">
-                <a:solidFill>
-                  <a:schemeClr val="tx1"/>
-                </a:solidFill>
-                <a:latin typeface="+mj-lt"/>
-                <a:ea typeface="+mj-ea"/>
-                <a:cs typeface="+mj-cs"/>
-              </a:defRPr>
-            </a:lvl1pPr>
-          </a:lstStyle>
-          <a:p>
-            <a:r>
-              <a:rPr lang="en-US" dirty="0"/>
-              <a:t>Typical Agentic Workflow</a:t>
+            <a:r>
+              <a:rPr lang="en-US" sz="5400" dirty="0"/>
+              <a:t>Dashboards</a:t>
             </a:r>
           </a:p>
         </p:txBody>
@@ -3996,7 +3462,7 @@
     </p:spTree>
     <p:extLst>
       <p:ext uri="{BB962C8B-B14F-4D97-AF65-F5344CB8AC3E}">
-        <p14:creationId xmlns:p14="http://schemas.microsoft.com/office/powerpoint/2010/main" val="3058200020"/>
+        <p14:creationId xmlns:p14="http://schemas.microsoft.com/office/powerpoint/2010/main" val="1347405283"/>
       </p:ext>
     </p:extLst>
   </p:cSld>
@@ -4014,7 +3480,7 @@
         <p:cNvPr id="1" name="">
           <a:extLst>
             <a:ext uri="{FF2B5EF4-FFF2-40B4-BE49-F238E27FC236}">
-              <a16:creationId xmlns:a16="http://schemas.microsoft.com/office/drawing/2014/main" id="{E30197CF-5889-9CC2-8C56-28938013790C}"/>
+              <a16:creationId xmlns:a16="http://schemas.microsoft.com/office/drawing/2014/main" id="{28E86F2E-DB6F-3885-6A4B-04CF5E79B880}"/>
             </a:ext>
           </a:extLst>
         </p:cNvPr>
@@ -4029,1820 +3495,12 @@
           <a:chExt cx="0" cy="0"/>
         </a:xfrm>
       </p:grpSpPr>
-      <p:sp>
-        <p:nvSpPr>
-          <p:cNvPr id="4" name="Rounded Rectangle 3">
-            <a:extLst>
-              <a:ext uri="{FF2B5EF4-FFF2-40B4-BE49-F238E27FC236}">
-                <a16:creationId xmlns:a16="http://schemas.microsoft.com/office/drawing/2014/main" id="{54A55A66-84D5-F76B-76E7-060E596DC06D}"/>
-              </a:ext>
-            </a:extLst>
-          </p:cNvPr>
-          <p:cNvSpPr/>
-          <p:nvPr/>
-        </p:nvSpPr>
-        <p:spPr>
-          <a:xfrm>
-            <a:off x="776177" y="2804338"/>
-            <a:ext cx="1169581" cy="927687"/>
-          </a:xfrm>
-          <a:prstGeom prst="roundRect">
-            <a:avLst/>
-          </a:prstGeom>
-          <a:ln>
-            <a:solidFill>
-              <a:schemeClr val="tx1"/>
-            </a:solidFill>
-          </a:ln>
-        </p:spPr>
-        <p:style>
-          <a:lnRef idx="2">
-            <a:schemeClr val="accent6"/>
-          </a:lnRef>
-          <a:fillRef idx="1">
-            <a:schemeClr val="lt1"/>
-          </a:fillRef>
-          <a:effectRef idx="0">
-            <a:schemeClr val="accent6"/>
-          </a:effectRef>
-          <a:fontRef idx="minor">
-            <a:schemeClr val="dk1"/>
-          </a:fontRef>
-        </p:style>
-        <p:txBody>
-          <a:bodyPr rtlCol="0" anchor="ctr"/>
-          <a:lstStyle/>
-          <a:p>
-            <a:pPr algn="ctr"/>
-            <a:r>
-              <a:rPr lang="en-US" dirty="0"/>
-              <a:t>Me</a:t>
-            </a:r>
-          </a:p>
-        </p:txBody>
-      </p:sp>
-      <p:sp>
-        <p:nvSpPr>
-          <p:cNvPr id="5" name="Rounded Rectangle 4">
-            <a:extLst>
-              <a:ext uri="{FF2B5EF4-FFF2-40B4-BE49-F238E27FC236}">
-                <a16:creationId xmlns:a16="http://schemas.microsoft.com/office/drawing/2014/main" id="{84132B7D-F748-9075-B0D6-6465EAF7BE38}"/>
-              </a:ext>
-            </a:extLst>
-          </p:cNvPr>
-          <p:cNvSpPr/>
-          <p:nvPr/>
-        </p:nvSpPr>
-        <p:spPr>
-          <a:xfrm>
-            <a:off x="3437863" y="2804338"/>
-            <a:ext cx="1169581" cy="927687"/>
-          </a:xfrm>
-          <a:prstGeom prst="roundRect">
-            <a:avLst/>
-          </a:prstGeom>
-          <a:ln>
-            <a:solidFill>
-              <a:schemeClr val="tx1"/>
-            </a:solidFill>
-          </a:ln>
-        </p:spPr>
-        <p:style>
-          <a:lnRef idx="2">
-            <a:schemeClr val="accent6"/>
-          </a:lnRef>
-          <a:fillRef idx="1">
-            <a:schemeClr val="lt1"/>
-          </a:fillRef>
-          <a:effectRef idx="0">
-            <a:schemeClr val="accent6"/>
-          </a:effectRef>
-          <a:fontRef idx="minor">
-            <a:schemeClr val="dk1"/>
-          </a:fontRef>
-        </p:style>
-        <p:txBody>
-          <a:bodyPr rtlCol="0" anchor="ctr"/>
-          <a:lstStyle/>
-          <a:p>
-            <a:pPr algn="ctr"/>
-            <a:r>
-              <a:rPr lang="en-US" dirty="0"/>
-              <a:t>Agent</a:t>
-            </a:r>
-          </a:p>
-        </p:txBody>
-      </p:sp>
-      <p:sp>
-        <p:nvSpPr>
-          <p:cNvPr id="6" name="Snip Diagonal Corner Rectangle 5">
-            <a:extLst>
-              <a:ext uri="{FF2B5EF4-FFF2-40B4-BE49-F238E27FC236}">
-                <a16:creationId xmlns:a16="http://schemas.microsoft.com/office/drawing/2014/main" id="{096D0A86-56FA-708D-8B04-6818B0A40341}"/>
-              </a:ext>
-            </a:extLst>
-          </p:cNvPr>
-          <p:cNvSpPr/>
-          <p:nvPr/>
-        </p:nvSpPr>
-        <p:spPr>
-          <a:xfrm>
-            <a:off x="6095999" y="2804339"/>
-            <a:ext cx="1792313" cy="927686"/>
-          </a:xfrm>
-          <a:prstGeom prst="snip2DiagRect">
-            <a:avLst/>
-          </a:prstGeom>
-        </p:spPr>
-        <p:style>
-          <a:lnRef idx="2">
-            <a:schemeClr val="accent1">
-              <a:shade val="15000"/>
-            </a:schemeClr>
-          </a:lnRef>
-          <a:fillRef idx="1">
-            <a:schemeClr val="accent1"/>
-          </a:fillRef>
-          <a:effectRef idx="0">
-            <a:schemeClr val="accent1"/>
-          </a:effectRef>
-          <a:fontRef idx="minor">
-            <a:schemeClr val="lt1"/>
-          </a:fontRef>
-        </p:style>
-        <p:txBody>
-          <a:bodyPr rtlCol="0" anchor="ctr"/>
-          <a:lstStyle/>
-          <a:p>
-            <a:pPr algn="ctr"/>
-            <a:r>
-              <a:rPr lang="en-US" dirty="0"/>
-              <a:t>.</a:t>
-            </a:r>
-            <a:r>
-              <a:rPr lang="en-US" dirty="0" err="1"/>
-              <a:t>qmd</a:t>
-            </a:r>
-            <a:r>
-              <a:rPr lang="en-US" dirty="0"/>
-              <a:t> file</a:t>
-            </a:r>
-          </a:p>
-          <a:p>
-            <a:pPr algn="ctr"/>
-            <a:r>
-              <a:rPr lang="en-US" dirty="0"/>
-              <a:t>(Probabilistic)</a:t>
-            </a:r>
-          </a:p>
-        </p:txBody>
-      </p:sp>
-      <p:sp>
-        <p:nvSpPr>
-          <p:cNvPr id="7" name="Rounded Rectangle 6">
-            <a:extLst>
-              <a:ext uri="{FF2B5EF4-FFF2-40B4-BE49-F238E27FC236}">
-                <a16:creationId xmlns:a16="http://schemas.microsoft.com/office/drawing/2014/main" id="{34AF2070-B542-F427-B1DC-B175A295D66B}"/>
-              </a:ext>
-            </a:extLst>
-          </p:cNvPr>
-          <p:cNvSpPr/>
-          <p:nvPr/>
-        </p:nvSpPr>
-        <p:spPr>
-          <a:xfrm>
-            <a:off x="3437863" y="4633440"/>
-            <a:ext cx="1169581" cy="927688"/>
-          </a:xfrm>
-          <a:prstGeom prst="roundRect">
-            <a:avLst/>
-          </a:prstGeom>
-        </p:spPr>
-        <p:style>
-          <a:lnRef idx="2">
-            <a:schemeClr val="accent2"/>
-          </a:lnRef>
-          <a:fillRef idx="1">
-            <a:schemeClr val="lt1"/>
-          </a:fillRef>
-          <a:effectRef idx="0">
-            <a:schemeClr val="accent2"/>
-          </a:effectRef>
-          <a:fontRef idx="minor">
-            <a:schemeClr val="dk1"/>
-          </a:fontRef>
-        </p:style>
-        <p:txBody>
-          <a:bodyPr rtlCol="0" anchor="ctr"/>
-          <a:lstStyle/>
-          <a:p>
-            <a:pPr algn="ctr"/>
-            <a:r>
-              <a:rPr lang="en-US" dirty="0"/>
-              <a:t>Data</a:t>
-            </a:r>
-          </a:p>
-        </p:txBody>
-      </p:sp>
-      <p:cxnSp>
-        <p:nvCxnSpPr>
-          <p:cNvPr id="9" name="Straight Arrow Connector 8">
-            <a:extLst>
-              <a:ext uri="{FF2B5EF4-FFF2-40B4-BE49-F238E27FC236}">
-                <a16:creationId xmlns:a16="http://schemas.microsoft.com/office/drawing/2014/main" id="{296113C7-818C-050B-9969-A53B888EF441}"/>
-              </a:ext>
-            </a:extLst>
-          </p:cNvPr>
-          <p:cNvCxnSpPr>
-            <a:cxnSpLocks/>
-            <a:stCxn id="4" idx="3"/>
-            <a:endCxn id="5" idx="1"/>
-          </p:cNvCxnSpPr>
-          <p:nvPr/>
-        </p:nvCxnSpPr>
-        <p:spPr>
-          <a:xfrm>
-            <a:off x="1945758" y="3268182"/>
-            <a:ext cx="1492105" cy="0"/>
-          </a:xfrm>
-          <a:prstGeom prst="straightConnector1">
-            <a:avLst/>
-          </a:prstGeom>
-          <a:ln>
-            <a:solidFill>
-              <a:schemeClr val="tx1"/>
-            </a:solidFill>
-            <a:tailEnd type="triangle" w="lg" len="lg"/>
-          </a:ln>
-        </p:spPr>
-        <p:style>
-          <a:lnRef idx="2">
-            <a:schemeClr val="accent1"/>
-          </a:lnRef>
-          <a:fillRef idx="0">
-            <a:schemeClr val="accent1"/>
-          </a:fillRef>
-          <a:effectRef idx="1">
-            <a:schemeClr val="accent1"/>
-          </a:effectRef>
-          <a:fontRef idx="minor">
-            <a:schemeClr val="tx1"/>
-          </a:fontRef>
-        </p:style>
-      </p:cxnSp>
-      <p:cxnSp>
-        <p:nvCxnSpPr>
-          <p:cNvPr id="10" name="Straight Arrow Connector 9">
-            <a:extLst>
-              <a:ext uri="{FF2B5EF4-FFF2-40B4-BE49-F238E27FC236}">
-                <a16:creationId xmlns:a16="http://schemas.microsoft.com/office/drawing/2014/main" id="{031270FC-4248-CF1C-D51D-184DA75553E5}"/>
-              </a:ext>
-            </a:extLst>
-          </p:cNvPr>
-          <p:cNvCxnSpPr>
-            <a:cxnSpLocks/>
-            <a:stCxn id="5" idx="3"/>
-            <a:endCxn id="6" idx="2"/>
-          </p:cNvCxnSpPr>
-          <p:nvPr/>
-        </p:nvCxnSpPr>
-        <p:spPr>
-          <a:xfrm>
-            <a:off x="4607444" y="3268182"/>
-            <a:ext cx="1488555" cy="0"/>
-          </a:xfrm>
-          <a:prstGeom prst="straightConnector1">
-            <a:avLst/>
-          </a:prstGeom>
-          <a:ln>
-            <a:solidFill>
-              <a:schemeClr val="tx1"/>
-            </a:solidFill>
-            <a:tailEnd type="triangle" w="lg" len="lg"/>
-          </a:ln>
-        </p:spPr>
-        <p:style>
-          <a:lnRef idx="2">
-            <a:schemeClr val="accent1"/>
-          </a:lnRef>
-          <a:fillRef idx="0">
-            <a:schemeClr val="accent1"/>
-          </a:fillRef>
-          <a:effectRef idx="1">
-            <a:schemeClr val="accent1"/>
-          </a:effectRef>
-          <a:fontRef idx="minor">
-            <a:schemeClr val="tx1"/>
-          </a:fontRef>
-        </p:style>
-      </p:cxnSp>
-      <p:sp>
-        <p:nvSpPr>
-          <p:cNvPr id="21" name="TextBox 20">
-            <a:extLst>
-              <a:ext uri="{FF2B5EF4-FFF2-40B4-BE49-F238E27FC236}">
-                <a16:creationId xmlns:a16="http://schemas.microsoft.com/office/drawing/2014/main" id="{A075882A-B247-A36E-0DD9-74B920E38F0E}"/>
-              </a:ext>
-            </a:extLst>
-          </p:cNvPr>
-          <p:cNvSpPr txBox="1"/>
-          <p:nvPr/>
-        </p:nvSpPr>
-        <p:spPr>
-          <a:xfrm>
-            <a:off x="2165597" y="2901656"/>
-            <a:ext cx="918265" cy="369332"/>
-          </a:xfrm>
-          <a:prstGeom prst="rect">
-            <a:avLst/>
-          </a:prstGeom>
-          <a:noFill/>
-        </p:spPr>
-        <p:txBody>
-          <a:bodyPr wrap="none" rtlCol="0" anchor="ctr">
-            <a:spAutoFit/>
-          </a:bodyPr>
-          <a:lstStyle/>
-          <a:p>
-            <a:pPr algn="ctr"/>
-            <a:r>
-              <a:rPr lang="en-US" dirty="0"/>
-              <a:t>Prompt</a:t>
-            </a:r>
-          </a:p>
-        </p:txBody>
-      </p:sp>
-      <p:sp>
-        <p:nvSpPr>
-          <p:cNvPr id="22" name="TextBox 21">
-            <a:extLst>
-              <a:ext uri="{FF2B5EF4-FFF2-40B4-BE49-F238E27FC236}">
-                <a16:creationId xmlns:a16="http://schemas.microsoft.com/office/drawing/2014/main" id="{7649008B-14A3-35D2-E697-83A3EA417F34}"/>
-              </a:ext>
-            </a:extLst>
-          </p:cNvPr>
-          <p:cNvSpPr txBox="1"/>
-          <p:nvPr/>
-        </p:nvSpPr>
-        <p:spPr>
-          <a:xfrm>
-            <a:off x="4649552" y="2895675"/>
-            <a:ext cx="1218154" cy="369332"/>
-          </a:xfrm>
-          <a:prstGeom prst="rect">
-            <a:avLst/>
-          </a:prstGeom>
-          <a:noFill/>
-        </p:spPr>
-        <p:txBody>
-          <a:bodyPr wrap="none" rtlCol="0" anchor="ctr">
-            <a:spAutoFit/>
-          </a:bodyPr>
-          <a:lstStyle/>
-          <a:p>
-            <a:pPr algn="ctr"/>
-            <a:r>
-              <a:rPr lang="en-US" dirty="0"/>
-              <a:t>Generates</a:t>
-            </a:r>
-          </a:p>
-        </p:txBody>
-      </p:sp>
-      <p:cxnSp>
-        <p:nvCxnSpPr>
-          <p:cNvPr id="2" name="Elbow Connector 1">
-            <a:extLst>
-              <a:ext uri="{FF2B5EF4-FFF2-40B4-BE49-F238E27FC236}">
-                <a16:creationId xmlns:a16="http://schemas.microsoft.com/office/drawing/2014/main" id="{5F3BC3BA-7C63-1770-3797-78004057284A}"/>
-              </a:ext>
-            </a:extLst>
-          </p:cNvPr>
-          <p:cNvCxnSpPr>
-            <a:cxnSpLocks/>
-            <a:stCxn id="7" idx="3"/>
-            <a:endCxn id="6" idx="1"/>
-          </p:cNvCxnSpPr>
-          <p:nvPr/>
-        </p:nvCxnSpPr>
-        <p:spPr>
-          <a:xfrm flipV="1">
-            <a:off x="4607444" y="3732025"/>
-            <a:ext cx="2384712" cy="1365259"/>
-          </a:xfrm>
-          <a:prstGeom prst="bentConnector2">
-            <a:avLst/>
-          </a:prstGeom>
-          <a:ln>
-            <a:solidFill>
-              <a:schemeClr val="tx1"/>
-            </a:solidFill>
-            <a:tailEnd type="triangle" w="lg" len="lg"/>
-          </a:ln>
-        </p:spPr>
-        <p:style>
-          <a:lnRef idx="2">
-            <a:schemeClr val="accent1"/>
-          </a:lnRef>
-          <a:fillRef idx="0">
-            <a:schemeClr val="accent1"/>
-          </a:fillRef>
-          <a:effectRef idx="1">
-            <a:schemeClr val="accent1"/>
-          </a:effectRef>
-          <a:fontRef idx="minor">
-            <a:schemeClr val="tx1"/>
-          </a:fontRef>
-        </p:style>
-      </p:cxnSp>
-      <p:sp>
-        <p:nvSpPr>
-          <p:cNvPr id="3" name="Rounded Rectangle 2">
-            <a:extLst>
-              <a:ext uri="{FF2B5EF4-FFF2-40B4-BE49-F238E27FC236}">
-                <a16:creationId xmlns:a16="http://schemas.microsoft.com/office/drawing/2014/main" id="{62CD7B1F-E8EE-4E3B-5C42-B5153F6224C3}"/>
-              </a:ext>
-            </a:extLst>
-          </p:cNvPr>
-          <p:cNvSpPr/>
-          <p:nvPr/>
-        </p:nvSpPr>
-        <p:spPr>
-          <a:xfrm>
-            <a:off x="9076661" y="2810689"/>
-            <a:ext cx="1169581" cy="927687"/>
-          </a:xfrm>
-          <a:prstGeom prst="roundRect">
-            <a:avLst/>
-          </a:prstGeom>
-          <a:ln>
-            <a:solidFill>
-              <a:schemeClr val="tx1"/>
-            </a:solidFill>
-          </a:ln>
-        </p:spPr>
-        <p:style>
-          <a:lnRef idx="2">
-            <a:schemeClr val="accent6"/>
-          </a:lnRef>
-          <a:fillRef idx="1">
-            <a:schemeClr val="lt1"/>
-          </a:fillRef>
-          <a:effectRef idx="0">
-            <a:schemeClr val="accent6"/>
-          </a:effectRef>
-          <a:fontRef idx="minor">
-            <a:schemeClr val="dk1"/>
-          </a:fontRef>
-        </p:style>
-        <p:txBody>
-          <a:bodyPr rtlCol="0" anchor="ctr"/>
-          <a:lstStyle/>
-          <a:p>
-            <a:pPr algn="ctr"/>
-            <a:r>
-              <a:rPr lang="en-US" dirty="0"/>
-              <a:t>Artifact</a:t>
-            </a:r>
-          </a:p>
-        </p:txBody>
-      </p:sp>
-      <p:cxnSp>
-        <p:nvCxnSpPr>
-          <p:cNvPr id="18" name="Straight Arrow Connector 17">
-            <a:extLst>
-              <a:ext uri="{FF2B5EF4-FFF2-40B4-BE49-F238E27FC236}">
-                <a16:creationId xmlns:a16="http://schemas.microsoft.com/office/drawing/2014/main" id="{2793DBC8-BEDB-7C95-407D-58B233C2CA9E}"/>
-              </a:ext>
-            </a:extLst>
-          </p:cNvPr>
-          <p:cNvCxnSpPr>
-            <a:cxnSpLocks/>
-            <a:stCxn id="6" idx="0"/>
-            <a:endCxn id="3" idx="1"/>
-          </p:cNvCxnSpPr>
-          <p:nvPr/>
-        </p:nvCxnSpPr>
-        <p:spPr>
-          <a:xfrm>
-            <a:off x="7888312" y="3268182"/>
-            <a:ext cx="1188349" cy="6351"/>
-          </a:xfrm>
-          <a:prstGeom prst="straightConnector1">
-            <a:avLst/>
-          </a:prstGeom>
-          <a:ln>
-            <a:solidFill>
-              <a:schemeClr val="tx1"/>
-            </a:solidFill>
-            <a:tailEnd type="triangle" w="lg" len="lg"/>
-          </a:ln>
-        </p:spPr>
-        <p:style>
-          <a:lnRef idx="2">
-            <a:schemeClr val="accent1"/>
-          </a:lnRef>
-          <a:fillRef idx="0">
-            <a:schemeClr val="accent1"/>
-          </a:fillRef>
-          <a:effectRef idx="1">
-            <a:schemeClr val="accent1"/>
-          </a:effectRef>
-          <a:fontRef idx="minor">
-            <a:schemeClr val="tx1"/>
-          </a:fontRef>
-        </p:style>
-      </p:cxnSp>
-      <p:sp>
-        <p:nvSpPr>
-          <p:cNvPr id="19" name="TextBox 18">
-            <a:extLst>
-              <a:ext uri="{FF2B5EF4-FFF2-40B4-BE49-F238E27FC236}">
-                <a16:creationId xmlns:a16="http://schemas.microsoft.com/office/drawing/2014/main" id="{4010137C-E620-6D4A-8D66-A729CBF5C0CC}"/>
-              </a:ext>
-            </a:extLst>
-          </p:cNvPr>
-          <p:cNvSpPr txBox="1"/>
-          <p:nvPr/>
-        </p:nvSpPr>
-        <p:spPr>
-          <a:xfrm>
-            <a:off x="7976898" y="2895675"/>
-            <a:ext cx="1011175" cy="369332"/>
-          </a:xfrm>
-          <a:prstGeom prst="rect">
-            <a:avLst/>
-          </a:prstGeom>
-          <a:noFill/>
-        </p:spPr>
-        <p:txBody>
-          <a:bodyPr wrap="none" rtlCol="0" anchor="ctr">
-            <a:spAutoFit/>
-          </a:bodyPr>
-          <a:lstStyle/>
-          <a:p>
-            <a:pPr algn="ctr"/>
-            <a:r>
-              <a:rPr lang="en-US" dirty="0"/>
-              <a:t>Renders</a:t>
-            </a:r>
-          </a:p>
-        </p:txBody>
-      </p:sp>
-      <p:sp>
-        <p:nvSpPr>
-          <p:cNvPr id="8" name="Title 1">
-            <a:extLst>
-              <a:ext uri="{FF2B5EF4-FFF2-40B4-BE49-F238E27FC236}">
-                <a16:creationId xmlns:a16="http://schemas.microsoft.com/office/drawing/2014/main" id="{3A25C02C-DF6E-0F9B-E8F6-28E2F0CC8DDA}"/>
-              </a:ext>
-            </a:extLst>
-          </p:cNvPr>
-          <p:cNvSpPr txBox="1">
-            <a:spLocks/>
-          </p:cNvSpPr>
-          <p:nvPr/>
-        </p:nvSpPr>
-        <p:spPr>
-          <a:xfrm>
-            <a:off x="838200" y="365125"/>
-            <a:ext cx="10515600" cy="1325563"/>
-          </a:xfrm>
-          <a:prstGeom prst="rect">
-            <a:avLst/>
-          </a:prstGeom>
-        </p:spPr>
-        <p:txBody>
-          <a:bodyPr vert="horz" lIns="91440" tIns="45720" rIns="91440" bIns="45720" rtlCol="0" anchor="b">
-            <a:normAutofit/>
-          </a:bodyPr>
-          <a:lstStyle>
-            <a:lvl1pPr algn="ctr" defTabSz="914400" rtl="0" eaLnBrk="1" latinLnBrk="0" hangingPunct="1">
-              <a:lnSpc>
-                <a:spcPct val="90000"/>
-              </a:lnSpc>
-              <a:spcBef>
-                <a:spcPct val="0"/>
-              </a:spcBef>
-              <a:buNone/>
-              <a:defRPr sz="6000" kern="1200">
-                <a:solidFill>
-                  <a:schemeClr val="tx1"/>
-                </a:solidFill>
-                <a:latin typeface="+mj-lt"/>
-                <a:ea typeface="+mj-ea"/>
-                <a:cs typeface="+mj-cs"/>
-              </a:defRPr>
-            </a:lvl1pPr>
-          </a:lstStyle>
-          <a:p>
-            <a:r>
-              <a:rPr lang="en-US" dirty="0"/>
-              <a:t>Agentic Workflow </a:t>
-            </a:r>
-            <a:r>
-              <a:rPr lang="en-US" i="1" dirty="0"/>
-              <a:t>with Quarto</a:t>
-            </a:r>
-          </a:p>
-        </p:txBody>
-      </p:sp>
-    </p:spTree>
-    <p:extLst>
-      <p:ext uri="{BB962C8B-B14F-4D97-AF65-F5344CB8AC3E}">
-        <p14:creationId xmlns:p14="http://schemas.microsoft.com/office/powerpoint/2010/main" val="2833978508"/>
-      </p:ext>
-    </p:extLst>
-  </p:cSld>
-  <p:clrMapOvr>
-    <a:masterClrMapping/>
-  </p:clrMapOvr>
-</p:sld>
-</file>
-
-<file path=ppt/slides/slide4.xml><?xml version="1.0" encoding="utf-8"?>
-<p:sld xmlns:a="http://schemas.openxmlformats.org/drawingml/2006/main" xmlns:r="http://schemas.openxmlformats.org/officeDocument/2006/relationships" xmlns:p="http://schemas.openxmlformats.org/presentationml/2006/main">
-  <p:cSld>
-    <p:spTree>
-      <p:nvGrpSpPr>
-        <p:cNvPr id="1" name="">
-          <a:extLst>
-            <a:ext uri="{FF2B5EF4-FFF2-40B4-BE49-F238E27FC236}">
-              <a16:creationId xmlns:a16="http://schemas.microsoft.com/office/drawing/2014/main" id="{6B220876-BE01-B05C-9BF5-38EEAD194F73}"/>
-            </a:ext>
-          </a:extLst>
-        </p:cNvPr>
-        <p:cNvGrpSpPr/>
-        <p:nvPr/>
-      </p:nvGrpSpPr>
-      <p:grpSpPr>
-        <a:xfrm>
-          <a:off x="0" y="0"/>
-          <a:ext cx="0" cy="0"/>
-          <a:chOff x="0" y="0"/>
-          <a:chExt cx="0" cy="0"/>
-        </a:xfrm>
-      </p:grpSpPr>
-      <p:sp>
-        <p:nvSpPr>
-          <p:cNvPr id="4" name="Rounded Rectangle 3">
-            <a:extLst>
-              <a:ext uri="{FF2B5EF4-FFF2-40B4-BE49-F238E27FC236}">
-                <a16:creationId xmlns:a16="http://schemas.microsoft.com/office/drawing/2014/main" id="{5CA7D2BB-88F2-1080-C1C2-BC6670F5A349}"/>
-              </a:ext>
-            </a:extLst>
-          </p:cNvPr>
-          <p:cNvSpPr/>
-          <p:nvPr/>
-        </p:nvSpPr>
-        <p:spPr>
-          <a:xfrm>
-            <a:off x="776177" y="2804338"/>
-            <a:ext cx="1169581" cy="927687"/>
-          </a:xfrm>
-          <a:prstGeom prst="roundRect">
-            <a:avLst/>
-          </a:prstGeom>
-          <a:ln>
-            <a:solidFill>
-              <a:schemeClr val="tx1"/>
-            </a:solidFill>
-          </a:ln>
-        </p:spPr>
-        <p:style>
-          <a:lnRef idx="2">
-            <a:schemeClr val="accent6"/>
-          </a:lnRef>
-          <a:fillRef idx="1">
-            <a:schemeClr val="lt1"/>
-          </a:fillRef>
-          <a:effectRef idx="0">
-            <a:schemeClr val="accent6"/>
-          </a:effectRef>
-          <a:fontRef idx="minor">
-            <a:schemeClr val="dk1"/>
-          </a:fontRef>
-        </p:style>
-        <p:txBody>
-          <a:bodyPr rtlCol="0" anchor="ctr"/>
-          <a:lstStyle/>
-          <a:p>
-            <a:pPr algn="ctr"/>
-            <a:r>
-              <a:rPr lang="en-US" dirty="0"/>
-              <a:t>Me</a:t>
-            </a:r>
-          </a:p>
-        </p:txBody>
-      </p:sp>
-      <p:sp>
-        <p:nvSpPr>
-          <p:cNvPr id="5" name="Rounded Rectangle 4">
-            <a:extLst>
-              <a:ext uri="{FF2B5EF4-FFF2-40B4-BE49-F238E27FC236}">
-                <a16:creationId xmlns:a16="http://schemas.microsoft.com/office/drawing/2014/main" id="{9C3F8A28-F3C1-F496-E552-53F50AB57F20}"/>
-              </a:ext>
-            </a:extLst>
-          </p:cNvPr>
-          <p:cNvSpPr/>
-          <p:nvPr/>
-        </p:nvSpPr>
-        <p:spPr>
-          <a:xfrm>
-            <a:off x="3437863" y="2804338"/>
-            <a:ext cx="1169581" cy="927687"/>
-          </a:xfrm>
-          <a:prstGeom prst="roundRect">
-            <a:avLst/>
-          </a:prstGeom>
-          <a:ln>
-            <a:solidFill>
-              <a:schemeClr val="tx1"/>
-            </a:solidFill>
-          </a:ln>
-        </p:spPr>
-        <p:style>
-          <a:lnRef idx="2">
-            <a:schemeClr val="accent6"/>
-          </a:lnRef>
-          <a:fillRef idx="1">
-            <a:schemeClr val="lt1"/>
-          </a:fillRef>
-          <a:effectRef idx="0">
-            <a:schemeClr val="accent6"/>
-          </a:effectRef>
-          <a:fontRef idx="minor">
-            <a:schemeClr val="dk1"/>
-          </a:fontRef>
-        </p:style>
-        <p:txBody>
-          <a:bodyPr rtlCol="0" anchor="ctr"/>
-          <a:lstStyle/>
-          <a:p>
-            <a:pPr algn="ctr"/>
-            <a:r>
-              <a:rPr lang="en-US" dirty="0"/>
-              <a:t>Agent</a:t>
-            </a:r>
-          </a:p>
-        </p:txBody>
-      </p:sp>
-      <p:sp>
-        <p:nvSpPr>
-          <p:cNvPr id="6" name="Snip Diagonal Corner Rectangle 5">
-            <a:extLst>
-              <a:ext uri="{FF2B5EF4-FFF2-40B4-BE49-F238E27FC236}">
-                <a16:creationId xmlns:a16="http://schemas.microsoft.com/office/drawing/2014/main" id="{6C7EB6E6-C4D0-7432-BCF0-4B7AE0EB61C0}"/>
-              </a:ext>
-            </a:extLst>
-          </p:cNvPr>
-          <p:cNvSpPr/>
-          <p:nvPr/>
-        </p:nvSpPr>
-        <p:spPr>
-          <a:xfrm>
-            <a:off x="6095999" y="2804339"/>
-            <a:ext cx="1792313" cy="927686"/>
-          </a:xfrm>
-          <a:prstGeom prst="snip2DiagRect">
-            <a:avLst/>
-          </a:prstGeom>
-        </p:spPr>
-        <p:style>
-          <a:lnRef idx="2">
-            <a:schemeClr val="accent1">
-              <a:shade val="15000"/>
-            </a:schemeClr>
-          </a:lnRef>
-          <a:fillRef idx="1">
-            <a:schemeClr val="accent1"/>
-          </a:fillRef>
-          <a:effectRef idx="0">
-            <a:schemeClr val="accent1"/>
-          </a:effectRef>
-          <a:fontRef idx="minor">
-            <a:schemeClr val="lt1"/>
-          </a:fontRef>
-        </p:style>
-        <p:txBody>
-          <a:bodyPr rtlCol="0" anchor="ctr"/>
-          <a:lstStyle/>
-          <a:p>
-            <a:pPr algn="ctr"/>
-            <a:r>
-              <a:rPr lang="en-US" dirty="0"/>
-              <a:t>.</a:t>
-            </a:r>
-            <a:r>
-              <a:rPr lang="en-US" dirty="0" err="1"/>
-              <a:t>qmd</a:t>
-            </a:r>
-            <a:r>
-              <a:rPr lang="en-US" dirty="0"/>
-              <a:t> file</a:t>
-            </a:r>
-          </a:p>
-          <a:p>
-            <a:pPr algn="ctr"/>
-            <a:r>
-              <a:rPr lang="en-US" dirty="0"/>
-              <a:t>(Probabilistic)</a:t>
-            </a:r>
-          </a:p>
-        </p:txBody>
-      </p:sp>
-      <p:sp>
-        <p:nvSpPr>
-          <p:cNvPr id="7" name="Rounded Rectangle 6">
-            <a:extLst>
-              <a:ext uri="{FF2B5EF4-FFF2-40B4-BE49-F238E27FC236}">
-                <a16:creationId xmlns:a16="http://schemas.microsoft.com/office/drawing/2014/main" id="{2062702C-6C47-5392-6F01-69D7ADDA8E01}"/>
-              </a:ext>
-            </a:extLst>
-          </p:cNvPr>
-          <p:cNvSpPr/>
-          <p:nvPr/>
-        </p:nvSpPr>
-        <p:spPr>
-          <a:xfrm>
-            <a:off x="3437863" y="4633440"/>
-            <a:ext cx="1169581" cy="927688"/>
-          </a:xfrm>
-          <a:prstGeom prst="roundRect">
-            <a:avLst/>
-          </a:prstGeom>
-        </p:spPr>
-        <p:style>
-          <a:lnRef idx="2">
-            <a:schemeClr val="accent2"/>
-          </a:lnRef>
-          <a:fillRef idx="1">
-            <a:schemeClr val="lt1"/>
-          </a:fillRef>
-          <a:effectRef idx="0">
-            <a:schemeClr val="accent2"/>
-          </a:effectRef>
-          <a:fontRef idx="minor">
-            <a:schemeClr val="dk1"/>
-          </a:fontRef>
-        </p:style>
-        <p:txBody>
-          <a:bodyPr rtlCol="0" anchor="ctr"/>
-          <a:lstStyle/>
-          <a:p>
-            <a:pPr algn="ctr"/>
-            <a:r>
-              <a:rPr lang="en-US" dirty="0"/>
-              <a:t>Data</a:t>
-            </a:r>
-          </a:p>
-        </p:txBody>
-      </p:sp>
-      <p:cxnSp>
-        <p:nvCxnSpPr>
-          <p:cNvPr id="9" name="Straight Arrow Connector 8">
-            <a:extLst>
-              <a:ext uri="{FF2B5EF4-FFF2-40B4-BE49-F238E27FC236}">
-                <a16:creationId xmlns:a16="http://schemas.microsoft.com/office/drawing/2014/main" id="{AEABDD57-BF24-E6BE-840E-BFD1A2F3AD52}"/>
-              </a:ext>
-            </a:extLst>
-          </p:cNvPr>
-          <p:cNvCxnSpPr>
-            <a:cxnSpLocks/>
-            <a:stCxn id="4" idx="3"/>
-            <a:endCxn id="5" idx="1"/>
-          </p:cNvCxnSpPr>
-          <p:nvPr/>
-        </p:nvCxnSpPr>
-        <p:spPr>
-          <a:xfrm>
-            <a:off x="1945758" y="3268182"/>
-            <a:ext cx="1492105" cy="0"/>
-          </a:xfrm>
-          <a:prstGeom prst="straightConnector1">
-            <a:avLst/>
-          </a:prstGeom>
-          <a:ln>
-            <a:solidFill>
-              <a:schemeClr val="tx1"/>
-            </a:solidFill>
-            <a:tailEnd type="triangle" w="lg" len="lg"/>
-          </a:ln>
-        </p:spPr>
-        <p:style>
-          <a:lnRef idx="2">
-            <a:schemeClr val="accent1"/>
-          </a:lnRef>
-          <a:fillRef idx="0">
-            <a:schemeClr val="accent1"/>
-          </a:fillRef>
-          <a:effectRef idx="1">
-            <a:schemeClr val="accent1"/>
-          </a:effectRef>
-          <a:fontRef idx="minor">
-            <a:schemeClr val="tx1"/>
-          </a:fontRef>
-        </p:style>
-      </p:cxnSp>
-      <p:cxnSp>
-        <p:nvCxnSpPr>
-          <p:cNvPr id="10" name="Straight Arrow Connector 9">
-            <a:extLst>
-              <a:ext uri="{FF2B5EF4-FFF2-40B4-BE49-F238E27FC236}">
-                <a16:creationId xmlns:a16="http://schemas.microsoft.com/office/drawing/2014/main" id="{C1235151-1E67-6C32-9D90-18990CAAB1A4}"/>
-              </a:ext>
-            </a:extLst>
-          </p:cNvPr>
-          <p:cNvCxnSpPr>
-            <a:cxnSpLocks/>
-            <a:stCxn id="5" idx="3"/>
-            <a:endCxn id="6" idx="2"/>
-          </p:cNvCxnSpPr>
-          <p:nvPr/>
-        </p:nvCxnSpPr>
-        <p:spPr>
-          <a:xfrm>
-            <a:off x="4607444" y="3268182"/>
-            <a:ext cx="1488555" cy="0"/>
-          </a:xfrm>
-          <a:prstGeom prst="straightConnector1">
-            <a:avLst/>
-          </a:prstGeom>
-          <a:ln>
-            <a:solidFill>
-              <a:schemeClr val="tx1"/>
-            </a:solidFill>
-            <a:tailEnd type="triangle" w="lg" len="lg"/>
-          </a:ln>
-        </p:spPr>
-        <p:style>
-          <a:lnRef idx="2">
-            <a:schemeClr val="accent1"/>
-          </a:lnRef>
-          <a:fillRef idx="0">
-            <a:schemeClr val="accent1"/>
-          </a:fillRef>
-          <a:effectRef idx="1">
-            <a:schemeClr val="accent1"/>
-          </a:effectRef>
-          <a:fontRef idx="minor">
-            <a:schemeClr val="tx1"/>
-          </a:fontRef>
-        </p:style>
-      </p:cxnSp>
-      <p:sp>
-        <p:nvSpPr>
-          <p:cNvPr id="21" name="TextBox 20">
-            <a:extLst>
-              <a:ext uri="{FF2B5EF4-FFF2-40B4-BE49-F238E27FC236}">
-                <a16:creationId xmlns:a16="http://schemas.microsoft.com/office/drawing/2014/main" id="{E5C780A8-981A-BAD9-7CFD-5554F6044DC8}"/>
-              </a:ext>
-            </a:extLst>
-          </p:cNvPr>
-          <p:cNvSpPr txBox="1"/>
-          <p:nvPr/>
-        </p:nvSpPr>
-        <p:spPr>
-          <a:xfrm>
-            <a:off x="2165597" y="2901656"/>
-            <a:ext cx="918265" cy="369332"/>
-          </a:xfrm>
-          <a:prstGeom prst="rect">
-            <a:avLst/>
-          </a:prstGeom>
-          <a:noFill/>
-        </p:spPr>
-        <p:txBody>
-          <a:bodyPr wrap="none" rtlCol="0" anchor="ctr">
-            <a:spAutoFit/>
-          </a:bodyPr>
-          <a:lstStyle/>
-          <a:p>
-            <a:pPr algn="ctr"/>
-            <a:r>
-              <a:rPr lang="en-US" dirty="0"/>
-              <a:t>Prompt</a:t>
-            </a:r>
-          </a:p>
-        </p:txBody>
-      </p:sp>
-      <p:sp>
-        <p:nvSpPr>
-          <p:cNvPr id="22" name="TextBox 21">
-            <a:extLst>
-              <a:ext uri="{FF2B5EF4-FFF2-40B4-BE49-F238E27FC236}">
-                <a16:creationId xmlns:a16="http://schemas.microsoft.com/office/drawing/2014/main" id="{A295F19E-AF57-E1D4-7DC6-141E549ABAA7}"/>
-              </a:ext>
-            </a:extLst>
-          </p:cNvPr>
-          <p:cNvSpPr txBox="1"/>
-          <p:nvPr/>
-        </p:nvSpPr>
-        <p:spPr>
-          <a:xfrm>
-            <a:off x="4649552" y="2895675"/>
-            <a:ext cx="1218154" cy="369332"/>
-          </a:xfrm>
-          <a:prstGeom prst="rect">
-            <a:avLst/>
-          </a:prstGeom>
-          <a:noFill/>
-        </p:spPr>
-        <p:txBody>
-          <a:bodyPr wrap="none" rtlCol="0" anchor="ctr">
-            <a:spAutoFit/>
-          </a:bodyPr>
-          <a:lstStyle/>
-          <a:p>
-            <a:pPr algn="ctr"/>
-            <a:r>
-              <a:rPr lang="en-US" dirty="0"/>
-              <a:t>Generates</a:t>
-            </a:r>
-          </a:p>
-        </p:txBody>
-      </p:sp>
-      <p:cxnSp>
-        <p:nvCxnSpPr>
-          <p:cNvPr id="2" name="Elbow Connector 1">
-            <a:extLst>
-              <a:ext uri="{FF2B5EF4-FFF2-40B4-BE49-F238E27FC236}">
-                <a16:creationId xmlns:a16="http://schemas.microsoft.com/office/drawing/2014/main" id="{3D30C9F1-0B1A-F40B-B60B-20313A7C42D9}"/>
-              </a:ext>
-            </a:extLst>
-          </p:cNvPr>
-          <p:cNvCxnSpPr>
-            <a:cxnSpLocks/>
-            <a:stCxn id="7" idx="3"/>
-            <a:endCxn id="6" idx="1"/>
-          </p:cNvCxnSpPr>
-          <p:nvPr/>
-        </p:nvCxnSpPr>
-        <p:spPr>
-          <a:xfrm flipV="1">
-            <a:off x="4607444" y="3732025"/>
-            <a:ext cx="2384712" cy="1365259"/>
-          </a:xfrm>
-          <a:prstGeom prst="bentConnector2">
-            <a:avLst/>
-          </a:prstGeom>
-          <a:ln>
-            <a:solidFill>
-              <a:schemeClr val="tx1"/>
-            </a:solidFill>
-            <a:tailEnd type="triangle" w="lg" len="lg"/>
-          </a:ln>
-        </p:spPr>
-        <p:style>
-          <a:lnRef idx="2">
-            <a:schemeClr val="accent1"/>
-          </a:lnRef>
-          <a:fillRef idx="0">
-            <a:schemeClr val="accent1"/>
-          </a:fillRef>
-          <a:effectRef idx="1">
-            <a:schemeClr val="accent1"/>
-          </a:effectRef>
-          <a:fontRef idx="minor">
-            <a:schemeClr val="tx1"/>
-          </a:fontRef>
-        </p:style>
-      </p:cxnSp>
-      <p:sp>
-        <p:nvSpPr>
-          <p:cNvPr id="3" name="Rounded Rectangle 2">
-            <a:extLst>
-              <a:ext uri="{FF2B5EF4-FFF2-40B4-BE49-F238E27FC236}">
-                <a16:creationId xmlns:a16="http://schemas.microsoft.com/office/drawing/2014/main" id="{6BF5D900-1850-BF61-8807-66E4C53DC28A}"/>
-              </a:ext>
-            </a:extLst>
-          </p:cNvPr>
-          <p:cNvSpPr/>
-          <p:nvPr/>
-        </p:nvSpPr>
-        <p:spPr>
-          <a:xfrm>
-            <a:off x="9076661" y="2810689"/>
-            <a:ext cx="1169581" cy="927687"/>
-          </a:xfrm>
-          <a:prstGeom prst="roundRect">
-            <a:avLst/>
-          </a:prstGeom>
-          <a:ln>
-            <a:solidFill>
-              <a:schemeClr val="tx1"/>
-            </a:solidFill>
-          </a:ln>
-        </p:spPr>
-        <p:style>
-          <a:lnRef idx="2">
-            <a:schemeClr val="accent6"/>
-          </a:lnRef>
-          <a:fillRef idx="1">
-            <a:schemeClr val="lt1"/>
-          </a:fillRef>
-          <a:effectRef idx="0">
-            <a:schemeClr val="accent6"/>
-          </a:effectRef>
-          <a:fontRef idx="minor">
-            <a:schemeClr val="dk1"/>
-          </a:fontRef>
-        </p:style>
-        <p:txBody>
-          <a:bodyPr rtlCol="0" anchor="ctr"/>
-          <a:lstStyle/>
-          <a:p>
-            <a:pPr algn="ctr"/>
-            <a:r>
-              <a:rPr lang="en-US" dirty="0"/>
-              <a:t>Artifact</a:t>
-            </a:r>
-          </a:p>
-        </p:txBody>
-      </p:sp>
-      <p:cxnSp>
-        <p:nvCxnSpPr>
-          <p:cNvPr id="18" name="Straight Arrow Connector 17">
-            <a:extLst>
-              <a:ext uri="{FF2B5EF4-FFF2-40B4-BE49-F238E27FC236}">
-                <a16:creationId xmlns:a16="http://schemas.microsoft.com/office/drawing/2014/main" id="{3CF1BAE7-E6C3-45FB-4B07-AACD872AC206}"/>
-              </a:ext>
-            </a:extLst>
-          </p:cNvPr>
-          <p:cNvCxnSpPr>
-            <a:cxnSpLocks/>
-            <a:stCxn id="6" idx="0"/>
-            <a:endCxn id="3" idx="1"/>
-          </p:cNvCxnSpPr>
-          <p:nvPr/>
-        </p:nvCxnSpPr>
-        <p:spPr>
-          <a:xfrm>
-            <a:off x="7888312" y="3268182"/>
-            <a:ext cx="1188349" cy="6351"/>
-          </a:xfrm>
-          <a:prstGeom prst="straightConnector1">
-            <a:avLst/>
-          </a:prstGeom>
-          <a:ln>
-            <a:solidFill>
-              <a:schemeClr val="tx1"/>
-            </a:solidFill>
-            <a:tailEnd type="triangle" w="lg" len="lg"/>
-          </a:ln>
-        </p:spPr>
-        <p:style>
-          <a:lnRef idx="2">
-            <a:schemeClr val="accent1"/>
-          </a:lnRef>
-          <a:fillRef idx="0">
-            <a:schemeClr val="accent1"/>
-          </a:fillRef>
-          <a:effectRef idx="1">
-            <a:schemeClr val="accent1"/>
-          </a:effectRef>
-          <a:fontRef idx="minor">
-            <a:schemeClr val="tx1"/>
-          </a:fontRef>
-        </p:style>
-      </p:cxnSp>
-      <p:sp>
-        <p:nvSpPr>
-          <p:cNvPr id="19" name="TextBox 18">
-            <a:extLst>
-              <a:ext uri="{FF2B5EF4-FFF2-40B4-BE49-F238E27FC236}">
-                <a16:creationId xmlns:a16="http://schemas.microsoft.com/office/drawing/2014/main" id="{0A64F78B-DFF4-F98B-AC71-2D68B1029C20}"/>
-              </a:ext>
-            </a:extLst>
-          </p:cNvPr>
-          <p:cNvSpPr txBox="1"/>
-          <p:nvPr/>
-        </p:nvSpPr>
-        <p:spPr>
-          <a:xfrm>
-            <a:off x="7976898" y="2895675"/>
-            <a:ext cx="1011175" cy="369332"/>
-          </a:xfrm>
-          <a:prstGeom prst="rect">
-            <a:avLst/>
-          </a:prstGeom>
-          <a:noFill/>
-        </p:spPr>
-        <p:txBody>
-          <a:bodyPr wrap="none" rtlCol="0" anchor="ctr">
-            <a:spAutoFit/>
-          </a:bodyPr>
-          <a:lstStyle/>
-          <a:p>
-            <a:pPr algn="ctr"/>
-            <a:r>
-              <a:rPr lang="en-US" dirty="0"/>
-              <a:t>Renders</a:t>
-            </a:r>
-          </a:p>
-        </p:txBody>
-      </p:sp>
-      <p:sp>
-        <p:nvSpPr>
-          <p:cNvPr id="8" name="Title 1">
-            <a:extLst>
-              <a:ext uri="{FF2B5EF4-FFF2-40B4-BE49-F238E27FC236}">
-                <a16:creationId xmlns:a16="http://schemas.microsoft.com/office/drawing/2014/main" id="{98AAEFB9-255B-3CF6-9B5D-D69A251750A9}"/>
-              </a:ext>
-            </a:extLst>
-          </p:cNvPr>
-          <p:cNvSpPr txBox="1">
-            <a:spLocks/>
-          </p:cNvSpPr>
-          <p:nvPr/>
-        </p:nvSpPr>
-        <p:spPr>
-          <a:xfrm>
-            <a:off x="838200" y="365125"/>
-            <a:ext cx="10515600" cy="1325563"/>
-          </a:xfrm>
-          <a:prstGeom prst="rect">
-            <a:avLst/>
-          </a:prstGeom>
-        </p:spPr>
-        <p:txBody>
-          <a:bodyPr vert="horz" lIns="91440" tIns="45720" rIns="91440" bIns="45720" rtlCol="0" anchor="b">
-            <a:normAutofit/>
-          </a:bodyPr>
-          <a:lstStyle>
-            <a:lvl1pPr algn="ctr" defTabSz="914400" rtl="0" eaLnBrk="1" latinLnBrk="0" hangingPunct="1">
-              <a:lnSpc>
-                <a:spcPct val="90000"/>
-              </a:lnSpc>
-              <a:spcBef>
-                <a:spcPct val="0"/>
-              </a:spcBef>
-              <a:buNone/>
-              <a:defRPr sz="6000" kern="1200">
-                <a:solidFill>
-                  <a:schemeClr val="tx1"/>
-                </a:solidFill>
-                <a:latin typeface="+mj-lt"/>
-                <a:ea typeface="+mj-ea"/>
-                <a:cs typeface="+mj-cs"/>
-              </a:defRPr>
-            </a:lvl1pPr>
-          </a:lstStyle>
-          <a:p>
-            <a:r>
-              <a:rPr lang="en-US" dirty="0"/>
-              <a:t>Agentic Workflow </a:t>
-            </a:r>
-            <a:r>
-              <a:rPr lang="en-US" i="1" dirty="0"/>
-              <a:t>with Quarto</a:t>
-            </a:r>
-          </a:p>
-        </p:txBody>
-      </p:sp>
-      <p:cxnSp>
-        <p:nvCxnSpPr>
-          <p:cNvPr id="11" name="Elbow Connector 10">
-            <a:extLst>
-              <a:ext uri="{FF2B5EF4-FFF2-40B4-BE49-F238E27FC236}">
-                <a16:creationId xmlns:a16="http://schemas.microsoft.com/office/drawing/2014/main" id="{D35B8D03-97E4-F4FA-F300-ED1D8017ED40}"/>
-              </a:ext>
-            </a:extLst>
-          </p:cNvPr>
-          <p:cNvCxnSpPr>
-            <a:cxnSpLocks/>
-            <a:stCxn id="4" idx="0"/>
-            <a:endCxn id="6" idx="3"/>
-          </p:cNvCxnSpPr>
-          <p:nvPr/>
-        </p:nvCxnSpPr>
-        <p:spPr>
-          <a:xfrm rot="16200000" flipH="1">
-            <a:off x="4176561" y="-11256"/>
-            <a:ext cx="1" cy="5631188"/>
-          </a:xfrm>
-          <a:prstGeom prst="bentConnector3">
-            <a:avLst>
-              <a:gd name="adj1" fmla="val -22860000000"/>
-            </a:avLst>
-          </a:prstGeom>
-          <a:ln>
-            <a:solidFill>
-              <a:schemeClr val="accent6"/>
-            </a:solidFill>
-            <a:tailEnd type="triangle" w="lg" len="lg"/>
-          </a:ln>
-        </p:spPr>
-        <p:style>
-          <a:lnRef idx="2">
-            <a:schemeClr val="accent1"/>
-          </a:lnRef>
-          <a:fillRef idx="0">
-            <a:schemeClr val="accent1"/>
-          </a:fillRef>
-          <a:effectRef idx="1">
-            <a:schemeClr val="accent1"/>
-          </a:effectRef>
-          <a:fontRef idx="minor">
-            <a:schemeClr val="tx1"/>
-          </a:fontRef>
-        </p:style>
-      </p:cxnSp>
-      <p:cxnSp>
-        <p:nvCxnSpPr>
-          <p:cNvPr id="14" name="Elbow Connector 13">
-            <a:extLst>
-              <a:ext uri="{FF2B5EF4-FFF2-40B4-BE49-F238E27FC236}">
-                <a16:creationId xmlns:a16="http://schemas.microsoft.com/office/drawing/2014/main" id="{16917181-8851-9F0D-73AB-613DE860B1D2}"/>
-              </a:ext>
-            </a:extLst>
-          </p:cNvPr>
-          <p:cNvCxnSpPr>
-            <a:cxnSpLocks/>
-            <a:stCxn id="3" idx="2"/>
-            <a:endCxn id="4" idx="2"/>
-          </p:cNvCxnSpPr>
-          <p:nvPr/>
-        </p:nvCxnSpPr>
-        <p:spPr>
-          <a:xfrm rot="5400000" flipH="1">
-            <a:off x="5508034" y="-415041"/>
-            <a:ext cx="6351" cy="8300484"/>
-          </a:xfrm>
-          <a:prstGeom prst="bentConnector3">
-            <a:avLst>
-              <a:gd name="adj1" fmla="val -35408408"/>
-            </a:avLst>
-          </a:prstGeom>
-          <a:ln>
-            <a:solidFill>
-              <a:schemeClr val="accent6"/>
-            </a:solidFill>
-            <a:tailEnd type="triangle" w="lg" len="lg"/>
-          </a:ln>
-        </p:spPr>
-        <p:style>
-          <a:lnRef idx="2">
-            <a:schemeClr val="accent1"/>
-          </a:lnRef>
-          <a:fillRef idx="0">
-            <a:schemeClr val="accent1"/>
-          </a:fillRef>
-          <a:effectRef idx="1">
-            <a:schemeClr val="accent1"/>
-          </a:effectRef>
-          <a:fontRef idx="minor">
-            <a:schemeClr val="tx1"/>
-          </a:fontRef>
-        </p:style>
-      </p:cxnSp>
-      <p:sp>
-        <p:nvSpPr>
-          <p:cNvPr id="15" name="TextBox 14">
-            <a:extLst>
-              <a:ext uri="{FF2B5EF4-FFF2-40B4-BE49-F238E27FC236}">
-                <a16:creationId xmlns:a16="http://schemas.microsoft.com/office/drawing/2014/main" id="{A52F5471-2BBF-8F98-C29A-811B7B94A3E3}"/>
-              </a:ext>
-            </a:extLst>
-          </p:cNvPr>
-          <p:cNvSpPr txBox="1"/>
-          <p:nvPr/>
-        </p:nvSpPr>
-        <p:spPr>
-          <a:xfrm>
-            <a:off x="4762971" y="5623015"/>
-            <a:ext cx="1654491" cy="369332"/>
-          </a:xfrm>
-          <a:prstGeom prst="rect">
-            <a:avLst/>
-          </a:prstGeom>
-          <a:noFill/>
-        </p:spPr>
-        <p:txBody>
-          <a:bodyPr wrap="none" rtlCol="0" anchor="ctr">
-            <a:spAutoFit/>
-          </a:bodyPr>
-          <a:lstStyle/>
-          <a:p>
-            <a:pPr algn="ctr"/>
-            <a:r>
-              <a:rPr lang="en-US" dirty="0">
-                <a:solidFill>
-                  <a:schemeClr val="accent6"/>
-                </a:solidFill>
-              </a:rPr>
-              <a:t>Review artifact</a:t>
-            </a:r>
-          </a:p>
-        </p:txBody>
-      </p:sp>
-      <p:sp>
-        <p:nvSpPr>
-          <p:cNvPr id="24" name="TextBox 23">
-            <a:extLst>
-              <a:ext uri="{FF2B5EF4-FFF2-40B4-BE49-F238E27FC236}">
-                <a16:creationId xmlns:a16="http://schemas.microsoft.com/office/drawing/2014/main" id="{8FA4E608-5434-CB1C-23C0-4CD77D8EAF37}"/>
-              </a:ext>
-            </a:extLst>
-          </p:cNvPr>
-          <p:cNvSpPr txBox="1"/>
-          <p:nvPr/>
-        </p:nvSpPr>
-        <p:spPr>
-          <a:xfrm>
-            <a:off x="1127675" y="2185475"/>
-            <a:ext cx="6097772" cy="369332"/>
-          </a:xfrm>
-          <a:prstGeom prst="rect">
-            <a:avLst/>
-          </a:prstGeom>
-          <a:noFill/>
-        </p:spPr>
-        <p:txBody>
-          <a:bodyPr wrap="square">
-            <a:spAutoFit/>
-          </a:bodyPr>
-          <a:lstStyle/>
-          <a:p>
-            <a:pPr algn="ctr"/>
-            <a:r>
-              <a:rPr lang="en-US" sz="1800" dirty="0">
-                <a:solidFill>
-                  <a:schemeClr val="accent6"/>
-                </a:solidFill>
-              </a:rPr>
-              <a:t>Update .</a:t>
-            </a:r>
-            <a:r>
-              <a:rPr lang="en-US" sz="1800" dirty="0" err="1">
-                <a:solidFill>
-                  <a:schemeClr val="accent6"/>
-                </a:solidFill>
-              </a:rPr>
-              <a:t>qmd</a:t>
-            </a:r>
-            <a:r>
-              <a:rPr lang="en-US" sz="1800" dirty="0">
-                <a:solidFill>
-                  <a:schemeClr val="accent6"/>
-                </a:solidFill>
-              </a:rPr>
-              <a:t> file directly (skip agent)</a:t>
-            </a:r>
-          </a:p>
-        </p:txBody>
-      </p:sp>
-    </p:spTree>
-    <p:extLst>
-      <p:ext uri="{BB962C8B-B14F-4D97-AF65-F5344CB8AC3E}">
-        <p14:creationId xmlns:p14="http://schemas.microsoft.com/office/powerpoint/2010/main" val="439074722"/>
-      </p:ext>
-    </p:extLst>
-  </p:cSld>
-  <p:clrMapOvr>
-    <a:masterClrMapping/>
-  </p:clrMapOvr>
-</p:sld>
-</file>
-
-<file path=ppt/slides/slide5.xml><?xml version="1.0" encoding="utf-8"?>
-<p:sld xmlns:a="http://schemas.openxmlformats.org/drawingml/2006/main" xmlns:r="http://schemas.openxmlformats.org/officeDocument/2006/relationships" xmlns:p="http://schemas.openxmlformats.org/presentationml/2006/main">
-  <p:cSld>
-    <p:spTree>
-      <p:nvGrpSpPr>
-        <p:cNvPr id="1" name="">
-          <a:extLst>
-            <a:ext uri="{FF2B5EF4-FFF2-40B4-BE49-F238E27FC236}">
-              <a16:creationId xmlns:a16="http://schemas.microsoft.com/office/drawing/2014/main" id="{8D6BE48A-58C3-B4D8-EC29-066D982FFC27}"/>
-            </a:ext>
-          </a:extLst>
-        </p:cNvPr>
-        <p:cNvGrpSpPr/>
-        <p:nvPr/>
-      </p:nvGrpSpPr>
-      <p:grpSpPr>
-        <a:xfrm>
-          <a:off x="0" y="0"/>
-          <a:ext cx="0" cy="0"/>
-          <a:chOff x="0" y="0"/>
-          <a:chExt cx="0" cy="0"/>
-        </a:xfrm>
-      </p:grpSpPr>
-      <p:sp>
-        <p:nvSpPr>
-          <p:cNvPr id="8" name="TextBox 7">
-            <a:extLst>
-              <a:ext uri="{FF2B5EF4-FFF2-40B4-BE49-F238E27FC236}">
-                <a16:creationId xmlns:a16="http://schemas.microsoft.com/office/drawing/2014/main" id="{8BCCBC18-E581-A4A0-04BA-55E3DFBDE764}"/>
-              </a:ext>
-            </a:extLst>
-          </p:cNvPr>
-          <p:cNvSpPr txBox="1"/>
-          <p:nvPr/>
-        </p:nvSpPr>
-        <p:spPr>
-          <a:xfrm>
-            <a:off x="2070689" y="1745143"/>
-            <a:ext cx="8561867" cy="3170099"/>
-          </a:xfrm>
-          <a:prstGeom prst="rect">
-            <a:avLst/>
-          </a:prstGeom>
-          <a:noFill/>
-        </p:spPr>
-        <p:txBody>
-          <a:bodyPr wrap="square">
-            <a:spAutoFit/>
-          </a:bodyPr>
-          <a:lstStyle/>
-          <a:p>
-            <a:r>
-              <a:rPr lang="en-US" sz="4000" dirty="0"/>
-              <a:t>Agents with Quarto buy you 3 things:</a:t>
-            </a:r>
-          </a:p>
-          <a:p>
-            <a:endParaRPr lang="en-US" sz="4000" dirty="0"/>
-          </a:p>
-          <a:p>
-            <a:pPr marL="285750" indent="-285750">
-              <a:buFont typeface="Arial" panose="020B0604020202020204" pitchFamily="34" charset="0"/>
-              <a:buChar char="•"/>
-            </a:pPr>
-            <a:r>
-              <a:rPr lang="en-US" sz="4000" dirty="0"/>
-              <a:t>Correctness</a:t>
-            </a:r>
-          </a:p>
-          <a:p>
-            <a:pPr marL="285750" indent="-285750">
-              <a:buFont typeface="Arial" panose="020B0604020202020204" pitchFamily="34" charset="0"/>
-              <a:buChar char="•"/>
-            </a:pPr>
-            <a:r>
-              <a:rPr lang="en-US" sz="4000" dirty="0"/>
-              <a:t>Efficiency</a:t>
-            </a:r>
-          </a:p>
-          <a:p>
-            <a:pPr marL="285750" indent="-285750">
-              <a:buFont typeface="Arial" panose="020B0604020202020204" pitchFamily="34" charset="0"/>
-              <a:buChar char="•"/>
-            </a:pPr>
-            <a:r>
-              <a:rPr lang="en-US" sz="4000" dirty="0"/>
-              <a:t>Trust</a:t>
-            </a:r>
-          </a:p>
-        </p:txBody>
-      </p:sp>
-    </p:spTree>
-    <p:extLst>
-      <p:ext uri="{BB962C8B-B14F-4D97-AF65-F5344CB8AC3E}">
-        <p14:creationId xmlns:p14="http://schemas.microsoft.com/office/powerpoint/2010/main" val="118762455"/>
-      </p:ext>
-    </p:extLst>
-  </p:cSld>
-  <p:clrMapOvr>
-    <a:masterClrMapping/>
-  </p:clrMapOvr>
-</p:sld>
-</file>
-
-<file path=ppt/slides/slide6.xml><?xml version="1.0" encoding="utf-8"?>
-<p:sld xmlns:a="http://schemas.openxmlformats.org/drawingml/2006/main" xmlns:r="http://schemas.openxmlformats.org/officeDocument/2006/relationships" xmlns:p="http://schemas.openxmlformats.org/presentationml/2006/main">
-  <p:cSld>
-    <p:spTree>
-      <p:nvGrpSpPr>
-        <p:cNvPr id="1" name="">
-          <a:extLst>
-            <a:ext uri="{FF2B5EF4-FFF2-40B4-BE49-F238E27FC236}">
-              <a16:creationId xmlns:a16="http://schemas.microsoft.com/office/drawing/2014/main" id="{C88D3D91-D0C0-67B3-EAA5-6C1B16A8F300}"/>
-            </a:ext>
-          </a:extLst>
-        </p:cNvPr>
-        <p:cNvGrpSpPr/>
-        <p:nvPr/>
-      </p:nvGrpSpPr>
-      <p:grpSpPr>
-        <a:xfrm>
-          <a:off x="0" y="0"/>
-          <a:ext cx="0" cy="0"/>
-          <a:chOff x="0" y="0"/>
-          <a:chExt cx="0" cy="0"/>
-        </a:xfrm>
-      </p:grpSpPr>
-      <p:sp>
-        <p:nvSpPr>
-          <p:cNvPr id="8" name="TextBox 7">
-            <a:extLst>
-              <a:ext uri="{FF2B5EF4-FFF2-40B4-BE49-F238E27FC236}">
-                <a16:creationId xmlns:a16="http://schemas.microsoft.com/office/drawing/2014/main" id="{6177956E-3826-72AE-3514-226466DE42EC}"/>
-              </a:ext>
-            </a:extLst>
-          </p:cNvPr>
-          <p:cNvSpPr txBox="1"/>
-          <p:nvPr/>
-        </p:nvSpPr>
-        <p:spPr>
-          <a:xfrm>
-            <a:off x="539600" y="437338"/>
-            <a:ext cx="8561867" cy="1323439"/>
-          </a:xfrm>
-          <a:prstGeom prst="rect">
-            <a:avLst/>
-          </a:prstGeom>
-          <a:noFill/>
-        </p:spPr>
-        <p:txBody>
-          <a:bodyPr wrap="square">
-            <a:spAutoFit/>
-          </a:bodyPr>
-          <a:lstStyle/>
-          <a:p>
-            <a:r>
-              <a:rPr lang="en-US" sz="4000" b="1" dirty="0"/>
-              <a:t>Correctness</a:t>
-            </a:r>
-          </a:p>
-          <a:p>
-            <a:endParaRPr lang="en-US" sz="4000" dirty="0"/>
-          </a:p>
-        </p:txBody>
-      </p:sp>
-      <p:sp>
-        <p:nvSpPr>
-          <p:cNvPr id="3" name="TextBox 2">
-            <a:extLst>
-              <a:ext uri="{FF2B5EF4-FFF2-40B4-BE49-F238E27FC236}">
-                <a16:creationId xmlns:a16="http://schemas.microsoft.com/office/drawing/2014/main" id="{69A1D472-D336-E0D8-9BE3-C76D66DFC1C2}"/>
-              </a:ext>
-            </a:extLst>
-          </p:cNvPr>
-          <p:cNvSpPr txBox="1"/>
-          <p:nvPr/>
-        </p:nvSpPr>
-        <p:spPr>
-          <a:xfrm>
-            <a:off x="1698549" y="2137167"/>
-            <a:ext cx="8200361" cy="2246769"/>
-          </a:xfrm>
-          <a:prstGeom prst="rect">
-            <a:avLst/>
-          </a:prstGeom>
-          <a:noFill/>
-        </p:spPr>
-        <p:txBody>
-          <a:bodyPr wrap="square">
-            <a:spAutoFit/>
-          </a:bodyPr>
-          <a:lstStyle/>
-          <a:p>
-            <a:r>
-              <a:rPr lang="en-US" sz="2800" b="1" dirty="0"/>
-              <a:t>Without Quarto</a:t>
-            </a:r>
-            <a:r>
-              <a:rPr lang="en-US" sz="2800" dirty="0"/>
-              <a:t>: Agent writes </a:t>
-            </a:r>
-            <a:r>
-              <a:rPr lang="en-US" sz="2800" i="1" dirty="0"/>
-              <a:t>probabilistic </a:t>
-            </a:r>
-            <a:r>
-              <a:rPr lang="en-US" sz="2800" dirty="0"/>
-              <a:t>output; numbers might be wrong</a:t>
-            </a:r>
-          </a:p>
-          <a:p>
-            <a:endParaRPr lang="en-US" sz="2800" dirty="0"/>
-          </a:p>
-          <a:p>
-            <a:r>
-              <a:rPr lang="en-US" sz="2800" b="1" dirty="0"/>
-              <a:t>With Quarto</a:t>
-            </a:r>
-            <a:r>
-              <a:rPr lang="en-US" sz="2800" dirty="0"/>
-              <a:t>: Agent writes </a:t>
-            </a:r>
-            <a:r>
-              <a:rPr lang="en-US" sz="2800" i="1" dirty="0"/>
-              <a:t>structure</a:t>
-            </a:r>
-            <a:r>
-              <a:rPr lang="en-US" sz="2800" dirty="0"/>
-              <a:t> and </a:t>
-            </a:r>
-            <a:r>
-              <a:rPr lang="en-US" sz="2800" i="1" dirty="0"/>
-              <a:t>code</a:t>
-            </a:r>
-            <a:r>
-              <a:rPr lang="en-US" sz="2800" dirty="0"/>
-              <a:t>; data flows through code, numbers are </a:t>
-            </a:r>
-            <a:r>
-              <a:rPr lang="en-US" sz="2800" i="1" dirty="0"/>
-              <a:t>computed</a:t>
-            </a:r>
-            <a:r>
-              <a:rPr lang="en-US" sz="2800" dirty="0"/>
-              <a:t>.</a:t>
-            </a:r>
-          </a:p>
-        </p:txBody>
-      </p:sp>
-    </p:spTree>
-    <p:extLst>
-      <p:ext uri="{BB962C8B-B14F-4D97-AF65-F5344CB8AC3E}">
-        <p14:creationId xmlns:p14="http://schemas.microsoft.com/office/powerpoint/2010/main" val="2967962347"/>
-      </p:ext>
-    </p:extLst>
-  </p:cSld>
-  <p:clrMapOvr>
-    <a:masterClrMapping/>
-  </p:clrMapOvr>
-</p:sld>
-</file>
-
-<file path=ppt/slides/slide7.xml><?xml version="1.0" encoding="utf-8"?>
-<p:sld xmlns:a="http://schemas.openxmlformats.org/drawingml/2006/main" xmlns:r="http://schemas.openxmlformats.org/officeDocument/2006/relationships" xmlns:p="http://schemas.openxmlformats.org/presentationml/2006/main">
-  <p:cSld>
-    <p:spTree>
-      <p:nvGrpSpPr>
-        <p:cNvPr id="1" name="">
-          <a:extLst>
-            <a:ext uri="{FF2B5EF4-FFF2-40B4-BE49-F238E27FC236}">
-              <a16:creationId xmlns:a16="http://schemas.microsoft.com/office/drawing/2014/main" id="{035073B8-D069-62C3-319D-BACD9F17B363}"/>
-            </a:ext>
-          </a:extLst>
-        </p:cNvPr>
-        <p:cNvGrpSpPr/>
-        <p:nvPr/>
-      </p:nvGrpSpPr>
-      <p:grpSpPr>
-        <a:xfrm>
-          <a:off x="0" y="0"/>
-          <a:ext cx="0" cy="0"/>
-          <a:chOff x="0" y="0"/>
-          <a:chExt cx="0" cy="0"/>
-        </a:xfrm>
-      </p:grpSpPr>
-      <p:sp>
-        <p:nvSpPr>
-          <p:cNvPr id="8" name="TextBox 7">
-            <a:extLst>
-              <a:ext uri="{FF2B5EF4-FFF2-40B4-BE49-F238E27FC236}">
-                <a16:creationId xmlns:a16="http://schemas.microsoft.com/office/drawing/2014/main" id="{3F79BEB1-D573-3F11-22E2-88F35A996346}"/>
-              </a:ext>
-            </a:extLst>
-          </p:cNvPr>
-          <p:cNvSpPr txBox="1"/>
-          <p:nvPr/>
-        </p:nvSpPr>
-        <p:spPr>
-          <a:xfrm>
-            <a:off x="390744" y="138889"/>
-            <a:ext cx="8561867" cy="2554545"/>
-          </a:xfrm>
-          <a:prstGeom prst="rect">
-            <a:avLst/>
-          </a:prstGeom>
-          <a:noFill/>
-        </p:spPr>
-        <p:txBody>
-          <a:bodyPr wrap="square">
-            <a:spAutoFit/>
-          </a:bodyPr>
-          <a:lstStyle/>
-          <a:p>
-            <a:r>
-              <a:rPr lang="en-US" sz="4000" b="1" dirty="0"/>
-              <a:t>Efficiency</a:t>
-            </a:r>
-          </a:p>
-          <a:p>
-            <a:r>
-              <a:rPr lang="en-US" sz="4000" dirty="0"/>
-              <a:t>With Quarto, agentic generates markdown, and format is </a:t>
-            </a:r>
-            <a:r>
-              <a:rPr lang="en-US" sz="4000" i="1" dirty="0"/>
-              <a:t>rendered</a:t>
-            </a:r>
-          </a:p>
-          <a:p>
-            <a:endParaRPr lang="en-US" sz="4000" dirty="0"/>
-          </a:p>
-        </p:txBody>
-      </p:sp>
       <p:pic>
         <p:nvPicPr>
-          <p:cNvPr id="2" name="Picture 1" descr="Dumbbell plot with four output types on the y-axis. Blue dots on the left show Quarto token counts; coral dots on the right show direct format token counts, connected by a grey line.">
-            <a:extLst>
-              <a:ext uri="{FF2B5EF4-FFF2-40B4-BE49-F238E27FC236}">
-                <a16:creationId xmlns:a16="http://schemas.microsoft.com/office/drawing/2014/main" id="{90836A7E-E9B8-5D2A-BD6C-FD519AE81E11}"/>
+          <p:cNvPr id="6" name="Picture 5">
+            <a:extLst>
+              <a:ext uri="{FF2B5EF4-FFF2-40B4-BE49-F238E27FC236}">
+                <a16:creationId xmlns:a16="http://schemas.microsoft.com/office/drawing/2014/main" id="{F3A298B8-2472-0C0D-BA04-5172FA246D69}"/>
               </a:ext>
             </a:extLst>
           </p:cNvPr>
@@ -5859,56 +3517,20 @@
         </p:blipFill>
         <p:spPr>
           <a:xfrm>
-            <a:off x="1726017" y="2349128"/>
-            <a:ext cx="8739966" cy="4369983"/>
+            <a:off x="941572" y="2273300"/>
+            <a:ext cx="3911600" cy="2311400"/>
           </a:xfrm>
           <a:prstGeom prst="rect">
             <a:avLst/>
           </a:prstGeom>
         </p:spPr>
       </p:pic>
-    </p:spTree>
-    <p:extLst>
-      <p:ext uri="{BB962C8B-B14F-4D97-AF65-F5344CB8AC3E}">
-        <p14:creationId xmlns:p14="http://schemas.microsoft.com/office/powerpoint/2010/main" val="2593912501"/>
-      </p:ext>
-    </p:extLst>
-  </p:cSld>
-  <p:clrMapOvr>
-    <a:masterClrMapping/>
-  </p:clrMapOvr>
-</p:sld>
-</file>
-
-<file path=ppt/slides/slide8.xml><?xml version="1.0" encoding="utf-8"?>
-<p:sld xmlns:a="http://schemas.openxmlformats.org/drawingml/2006/main" xmlns:r="http://schemas.openxmlformats.org/officeDocument/2006/relationships" xmlns:p="http://schemas.openxmlformats.org/presentationml/2006/main">
-  <p:cSld>
-    <p:spTree>
-      <p:nvGrpSpPr>
-        <p:cNvPr id="1" name="">
-          <a:extLst>
-            <a:ext uri="{FF2B5EF4-FFF2-40B4-BE49-F238E27FC236}">
-              <a16:creationId xmlns:a16="http://schemas.microsoft.com/office/drawing/2014/main" id="{984DDDAD-C950-7B82-0DD0-17FC58ED3CBA}"/>
-            </a:ext>
-          </a:extLst>
-        </p:cNvPr>
-        <p:cNvGrpSpPr/>
-        <p:nvPr/>
-      </p:nvGrpSpPr>
-      <p:grpSpPr>
-        <a:xfrm>
-          <a:off x="0" y="0"/>
-          <a:ext cx="0" cy="0"/>
-          <a:chOff x="0" y="0"/>
-          <a:chExt cx="0" cy="0"/>
-        </a:xfrm>
-      </p:grpSpPr>
-      <p:sp>
-        <p:nvSpPr>
-          <p:cNvPr id="8" name="TextBox 7">
-            <a:extLst>
-              <a:ext uri="{FF2B5EF4-FFF2-40B4-BE49-F238E27FC236}">
-                <a16:creationId xmlns:a16="http://schemas.microsoft.com/office/drawing/2014/main" id="{01A03A5D-7236-706A-81DB-F2E146B3E844}"/>
+      <p:sp>
+        <p:nvSpPr>
+          <p:cNvPr id="2" name="TextBox 1">
+            <a:extLst>
+              <a:ext uri="{FF2B5EF4-FFF2-40B4-BE49-F238E27FC236}">
+                <a16:creationId xmlns:a16="http://schemas.microsoft.com/office/drawing/2014/main" id="{42A4A241-2A11-688C-79FC-698E06D053A1}"/>
               </a:ext>
             </a:extLst>
           </p:cNvPr>
@@ -5917,8 +3539,8 @@
         </p:nvSpPr>
         <p:spPr>
           <a:xfrm>
-            <a:off x="539600" y="437338"/>
-            <a:ext cx="8561867" cy="1323439"/>
+            <a:off x="5946728" y="4295188"/>
+            <a:ext cx="3829318" cy="923330"/>
           </a:xfrm>
           <a:prstGeom prst="rect">
             <a:avLst/>
@@ -5926,18 +3548,15 @@
           <a:noFill/>
         </p:spPr>
         <p:txBody>
-          <a:bodyPr wrap="square">
+          <a:bodyPr wrap="none" rtlCol="0">
             <a:spAutoFit/>
           </a:bodyPr>
           <a:lstStyle/>
           <a:p>
             <a:r>
-              <a:rPr lang="en-US" sz="4000" b="1" dirty="0"/>
-              <a:t>Trust</a:t>
-            </a:r>
-          </a:p>
-          <a:p>
-            <a:endParaRPr lang="en-US" sz="4000" dirty="0"/>
+              <a:rPr lang="en-US" sz="5400" dirty="0"/>
+              <a:t>Dashboards</a:t>
+            </a:r>
           </a:p>
         </p:txBody>
       </p:sp>
@@ -5946,7 +3565,7 @@
           <p:cNvPr id="3" name="TextBox 2">
             <a:extLst>
               <a:ext uri="{FF2B5EF4-FFF2-40B4-BE49-F238E27FC236}">
-                <a16:creationId xmlns:a16="http://schemas.microsoft.com/office/drawing/2014/main" id="{62232ED4-EB2F-03DE-BB0B-85596D84D8EE}"/>
+                <a16:creationId xmlns:a16="http://schemas.microsoft.com/office/drawing/2014/main" id="{B29D5520-4BAC-7C93-4E20-15B88FD6AE4E}"/>
               </a:ext>
             </a:extLst>
           </p:cNvPr>
@@ -5955,8 +3574,8 @@
         </p:nvSpPr>
         <p:spPr>
           <a:xfrm>
-            <a:off x="1698549" y="2137167"/>
-            <a:ext cx="8476809" cy="2246769"/>
+            <a:off x="5946728" y="1811635"/>
+            <a:ext cx="5612690" cy="923330"/>
           </a:xfrm>
           <a:prstGeom prst="rect">
             <a:avLst/>
@@ -5964,81 +3583,14 @@
           <a:noFill/>
         </p:spPr>
         <p:txBody>
-          <a:bodyPr wrap="square">
+          <a:bodyPr wrap="none" rtlCol="0">
             <a:spAutoFit/>
           </a:bodyPr>
           <a:lstStyle/>
           <a:p>
             <a:r>
-              <a:rPr lang="en-US" sz="2800" b="1" dirty="0"/>
-              <a:t>Checkable by machine:</a:t>
-            </a:r>
-            <a:r>
-              <a:rPr lang="en-US" sz="2800" dirty="0"/>
-              <a:t> </a:t>
-            </a:r>
-            <a:r>
-              <a:rPr lang="en-US" sz="2400" dirty="0">
-                <a:latin typeface="Monaco" pitchFamily="2" charset="77"/>
-              </a:rPr>
-              <a:t>quarto render</a:t>
-            </a:r>
-            <a:r>
-              <a:rPr lang="en-US" sz="2800" dirty="0"/>
-              <a:t> fails </a:t>
-            </a:r>
-            <a:r>
-              <a:rPr lang="en-US" sz="2800" i="1" dirty="0"/>
-              <a:t>loudly</a:t>
-            </a:r>
-            <a:r>
-              <a:rPr lang="en-US" sz="2800" dirty="0"/>
-              <a:t>; (broken references, bad </a:t>
-            </a:r>
-            <a:r>
-              <a:rPr lang="en-US" sz="2800" dirty="0" err="1"/>
-              <a:t>yaml</a:t>
-            </a:r>
-            <a:r>
-              <a:rPr lang="en-US" sz="2800" dirty="0"/>
-              <a:t>, </a:t>
-            </a:r>
-            <a:r>
-              <a:rPr lang="en-US" sz="2800" dirty="0" err="1"/>
-              <a:t>etc</a:t>
-            </a:r>
-            <a:r>
-              <a:rPr lang="en-US" sz="2800" dirty="0"/>
-              <a:t>)</a:t>
-            </a:r>
-          </a:p>
-          <a:p>
-            <a:endParaRPr lang="en-US" sz="2800" dirty="0"/>
-          </a:p>
-          <a:p>
-            <a:r>
-              <a:rPr lang="en-US" sz="2800" b="1" dirty="0"/>
-              <a:t>Checkable by human</a:t>
-            </a:r>
-            <a:r>
-              <a:rPr lang="en-US" sz="2800" dirty="0"/>
-              <a:t>: plain-text .</a:t>
-            </a:r>
-            <a:r>
-              <a:rPr lang="en-US" sz="2800" dirty="0" err="1"/>
-              <a:t>qmd</a:t>
-            </a:r>
-            <a:r>
-              <a:rPr lang="en-US" sz="2800" dirty="0"/>
-              <a:t> source means the agent's edit is a </a:t>
-            </a:r>
-            <a:r>
-              <a:rPr lang="en-US" sz="2800" i="1" dirty="0"/>
-              <a:t>diff</a:t>
-            </a:r>
-            <a:r>
-              <a:rPr lang="en-US" sz="2800" dirty="0"/>
-              <a:t>.</a:t>
+              <a:rPr lang="en-US" sz="5400" dirty="0"/>
+              <a:t>Agentic workflows</a:t>
             </a:r>
           </a:p>
         </p:txBody>
@@ -6046,7 +3598,7 @@
     </p:spTree>
     <p:extLst>
       <p:ext uri="{BB962C8B-B14F-4D97-AF65-F5344CB8AC3E}">
-        <p14:creationId xmlns:p14="http://schemas.microsoft.com/office/powerpoint/2010/main" val="2346450093"/>
+        <p14:creationId xmlns:p14="http://schemas.microsoft.com/office/powerpoint/2010/main" val="794260317"/>
       </p:ext>
     </p:extLst>
   </p:cSld>
